--- a/Lectures/07-formulation-and-baselines.pptx
+++ b/Lectures/07-formulation-and-baselines.pptx
@@ -5,7 +5,7 @@
     <p:sldMasterId id="2147483648" r:id="rId1"/>
   </p:sldMasterIdLst>
   <p:notesMasterIdLst>
-    <p:notesMasterId r:id="rId30"/>
+    <p:notesMasterId r:id="rId29"/>
   </p:notesMasterIdLst>
   <p:sldIdLst>
     <p:sldId id="256" r:id="rId2"/>
@@ -13,32 +13,34 @@
     <p:sldId id="424" r:id="rId4"/>
     <p:sldId id="446" r:id="rId5"/>
     <p:sldId id="440" r:id="rId6"/>
-    <p:sldId id="447" r:id="rId7"/>
-    <p:sldId id="430" r:id="rId8"/>
-    <p:sldId id="425" r:id="rId9"/>
-    <p:sldId id="434" r:id="rId10"/>
-    <p:sldId id="429" r:id="rId11"/>
-    <p:sldId id="435" r:id="rId12"/>
-    <p:sldId id="443" r:id="rId13"/>
-    <p:sldId id="444" r:id="rId14"/>
-    <p:sldId id="428" r:id="rId15"/>
-    <p:sldId id="441" r:id="rId16"/>
-    <p:sldId id="442" r:id="rId17"/>
-    <p:sldId id="445" r:id="rId18"/>
-    <p:sldId id="261" r:id="rId19"/>
-    <p:sldId id="269" r:id="rId20"/>
-    <p:sldId id="273" r:id="rId21"/>
-    <p:sldId id="277" r:id="rId22"/>
-    <p:sldId id="285" r:id="rId23"/>
-    <p:sldId id="427" r:id="rId24"/>
-    <p:sldId id="432" r:id="rId25"/>
-    <p:sldId id="448" r:id="rId26"/>
+    <p:sldId id="450" r:id="rId7"/>
+    <p:sldId id="447" r:id="rId8"/>
+    <p:sldId id="430" r:id="rId9"/>
+    <p:sldId id="425" r:id="rId10"/>
+    <p:sldId id="434" r:id="rId11"/>
+    <p:sldId id="429" r:id="rId12"/>
+    <p:sldId id="435" r:id="rId13"/>
+    <p:sldId id="443" r:id="rId14"/>
+    <p:sldId id="444" r:id="rId15"/>
+    <p:sldId id="442" r:id="rId16"/>
+    <p:sldId id="445" r:id="rId17"/>
+    <p:sldId id="261" r:id="rId18"/>
+    <p:sldId id="269" r:id="rId19"/>
+    <p:sldId id="273" r:id="rId20"/>
+    <p:sldId id="277" r:id="rId21"/>
+    <p:sldId id="285" r:id="rId22"/>
+    <p:sldId id="427" r:id="rId23"/>
+    <p:sldId id="432" r:id="rId24"/>
+    <p:sldId id="448" r:id="rId25"/>
+    <p:sldId id="451" r:id="rId26"/>
     <p:sldId id="431" r:id="rId27"/>
-    <p:sldId id="433" r:id="rId28"/>
-    <p:sldId id="449" r:id="rId29"/>
+    <p:sldId id="449" r:id="rId28"/>
   </p:sldIdLst>
   <p:sldSz cx="12192000" cy="6858000"/>
   <p:notesSz cx="6858000" cy="9144000"/>
+  <p:custDataLst>
+    <p:tags r:id="rId30"/>
+  </p:custDataLst>
   <p:defaultTextStyle>
     <a:defPPr marR="0" lvl="0" algn="l" rtl="0">
       <a:lnSpc>
@@ -273,7 +275,7 @@
       <p15:sldGuideLst xmlns:p15="http://schemas.microsoft.com/office/powerpoint/2012/main"/>
     </p:ext>
     <p:ext uri="http://customooxmlschemas.google.com/">
-      <go:slidesCustomData xmlns:go="http://customooxmlschemas.google.com/" xmlns:p15="http://schemas.microsoft.com/office/powerpoint/2012/main" xmlns:p14="http://schemas.microsoft.com/office/powerpoint/2010/main" xmlns:com="http://schemas.openxmlformats.org/drawingml/2006/compatibility" xmlns:pvml="urn:schemas-microsoft-com:office:powerpoint" xmlns:v="urn:schemas-microsoft-com:vml" xmlns:o="urn:schemas-microsoft-com:office:office" xmlns:dgm="http://schemas.openxmlformats.org/drawingml/2006/diagram" xmlns:c="http://schemas.openxmlformats.org/drawingml/2006/chart" xmlns:mv="urn:schemas-microsoft-com:mac:vml" xmlns:mc="http://schemas.openxmlformats.org/markup-compatibility/2006" xmlns="" r:id="rId31" roundtripDataSignature="AMtx7mjFyVUGRZWio+dc9dxzYsimUxNJbg=="/>
+      <go:slidesCustomData xmlns="" xmlns:mc="http://schemas.openxmlformats.org/markup-compatibility/2006" xmlns:mv="urn:schemas-microsoft-com:mac:vml" xmlns:c="http://schemas.openxmlformats.org/drawingml/2006/chart" xmlns:dgm="http://schemas.openxmlformats.org/drawingml/2006/diagram" xmlns:o="urn:schemas-microsoft-com:office:office" xmlns:v="urn:schemas-microsoft-com:vml" xmlns:pvml="urn:schemas-microsoft-com:office:powerpoint" xmlns:com="http://schemas.openxmlformats.org/drawingml/2006/compatibility" xmlns:p14="http://schemas.microsoft.com/office/powerpoint/2010/main" xmlns:p15="http://schemas.microsoft.com/office/powerpoint/2012/main" xmlns:go="http://customooxmlschemas.google.com/" r:id="rId31" roundtripDataSignature="AMtx7mjFyVUGRZWio+dc9dxzYsimUxNJbg=="/>
     </p:ext>
   </p:extLst>
 </p:presentation>
@@ -2852,6 +2854,74 @@
 </p:sldLayout>
 </file>
 
+<file path=ppt/slideLayouts/slideLayout3.xml><?xml version="1.0" encoding="utf-8"?>
+<p:sldLayout xmlns:a="http://schemas.openxmlformats.org/drawingml/2006/main" xmlns:r="http://schemas.openxmlformats.org/officeDocument/2006/relationships" xmlns:p="http://schemas.openxmlformats.org/presentationml/2006/main" type="blank" preserve="1">
+  <p:cSld name="Blank">
+    <p:spTree>
+      <p:nvGrpSpPr>
+        <p:cNvPr id="1" name=""/>
+        <p:cNvGrpSpPr/>
+        <p:nvPr/>
+      </p:nvGrpSpPr>
+      <p:grpSpPr>
+        <a:xfrm>
+          <a:off x="0" y="0"/>
+          <a:ext cx="0" cy="0"/>
+          <a:chOff x="0" y="0"/>
+          <a:chExt cx="0" cy="0"/>
+        </a:xfrm>
+      </p:grpSpPr>
+      <p:sp>
+        <p:nvSpPr>
+          <p:cNvPr id="2" name="Slide Number Placeholder 1">
+            <a:extLst>
+              <a:ext uri="{FF2B5EF4-FFF2-40B4-BE49-F238E27FC236}">
+                <a16:creationId xmlns:a16="http://schemas.microsoft.com/office/drawing/2014/main" id="{95D47466-B32A-272E-9563-02025B8DC287}"/>
+              </a:ext>
+            </a:extLst>
+          </p:cNvPr>
+          <p:cNvSpPr>
+            <a:spLocks noGrp="1"/>
+          </p:cNvSpPr>
+          <p:nvPr>
+            <p:ph type="sldNum" idx="10"/>
+          </p:nvPr>
+        </p:nvSpPr>
+        <p:spPr/>
+        <p:txBody>
+          <a:bodyPr/>
+          <a:lstStyle/>
+          <a:p>
+            <a:pPr marL="0" lvl="0" indent="0" algn="r" rtl="0">
+              <a:spcBef>
+                <a:spcPts val="0"/>
+              </a:spcBef>
+              <a:spcAft>
+                <a:spcPts val="0"/>
+              </a:spcAft>
+              <a:buNone/>
+            </a:pPr>
+            <a:fld id="{00000000-1234-1234-1234-123412341234}" type="slidenum">
+              <a:rPr lang="en-US" smtClean="0"/>
+              <a:t>‹#›</a:t>
+            </a:fld>
+            <a:endParaRPr lang="en-US"/>
+          </a:p>
+        </p:txBody>
+      </p:sp>
+    </p:spTree>
+    <p:extLst>
+      <p:ext uri="{BB962C8B-B14F-4D97-AF65-F5344CB8AC3E}">
+        <p14:creationId xmlns:p14="http://schemas.microsoft.com/office/powerpoint/2010/main" val="3413465026"/>
+      </p:ext>
+    </p:extLst>
+  </p:cSld>
+  <p:clrMapOvr>
+    <a:masterClrMapping/>
+  </p:clrMapOvr>
+</p:sldLayout>
+</file>
+
 <file path=ppt/slideMasters/slideMaster1.xml><?xml version="1.0" encoding="utf-8"?>
 <p:sldMaster xmlns:a="http://schemas.openxmlformats.org/drawingml/2006/main" xmlns:r="http://schemas.openxmlformats.org/officeDocument/2006/relationships" xmlns:p="http://schemas.openxmlformats.org/presentationml/2006/main">
   <p:cSld name="simple-light-2">
@@ -3421,6 +3491,7 @@
   <p:sldLayoutIdLst>
     <p:sldLayoutId id="2147483649" r:id="rId1"/>
     <p:sldLayoutId id="2147483661" r:id="rId2"/>
+    <p:sldLayoutId id="2147483662" r:id="rId3"/>
   </p:sldLayoutIdLst>
   <p:hf sldNum="0" hdr="0" ftr="0" dt="0"/>
   <p:txStyles>
@@ -4223,7 +4294,7 @@
           <p:cNvPr id="2" name="Text Placeholder 1">
             <a:extLst>
               <a:ext uri="{FF2B5EF4-FFF2-40B4-BE49-F238E27FC236}">
-                <a16:creationId xmlns:a16="http://schemas.microsoft.com/office/drawing/2014/main" id="{1BF58D61-D951-4047-914F-96A26849E50A}"/>
+                <a16:creationId xmlns:a16="http://schemas.microsoft.com/office/drawing/2014/main" id="{4F90177E-EDBA-BC41-B606-574933A1A307}"/>
               </a:ext>
             </a:extLst>
           </p:cNvPr>
@@ -4241,43 +4312,25 @@
           <a:p>
             <a:r>
               <a:rPr lang="en-US" dirty="0"/>
-              <a:t>Every entity that exists?</a:t>
-            </a:r>
+              <a:t>What type of analysis are you doing?</a:t>
+            </a:r>
+          </a:p>
+          <a:p>
+            <a:endParaRPr lang="en-US" dirty="0"/>
+          </a:p>
+          <a:p>
+            <a:r>
+              <a:rPr lang="en-US" dirty="0"/>
+              <a:t>What are the relevant entities? How do you identify the cohort?</a:t>
+            </a:r>
+            <a:br>
+              <a:rPr lang="en-US" dirty="0"/>
+            </a:br>
             <a:br>
               <a:rPr lang="en-US" dirty="0"/>
             </a:br>
             <a:endParaRPr lang="en-US" dirty="0"/>
           </a:p>
-          <a:p>
-            <a:r>
-              <a:rPr lang="en-US" dirty="0"/>
-              <a:t>“Active” entities?</a:t>
-            </a:r>
-            <a:br>
-              <a:rPr lang="en-US" dirty="0"/>
-            </a:br>
-            <a:endParaRPr lang="en-US" dirty="0"/>
-          </a:p>
-          <a:p>
-            <a:r>
-              <a:rPr lang="en-US" dirty="0"/>
-              <a:t>Event-based?</a:t>
-            </a:r>
-          </a:p>
-          <a:p>
-            <a:pPr lvl="1"/>
-            <a:r>
-              <a:rPr lang="en-US" dirty="0"/>
-              <a:t>Making predictions when the events occur?</a:t>
-            </a:r>
-          </a:p>
-          <a:p>
-            <a:pPr lvl="1"/>
-            <a:r>
-              <a:rPr lang="en-US" dirty="0"/>
-              <a:t>All entities that have had an event in a certain time window?</a:t>
-            </a:r>
-          </a:p>
         </p:txBody>
       </p:sp>
       <p:sp>
@@ -4285,7 +4338,7 @@
           <p:cNvPr id="3" name="Title 2">
             <a:extLst>
               <a:ext uri="{FF2B5EF4-FFF2-40B4-BE49-F238E27FC236}">
-                <a16:creationId xmlns:a16="http://schemas.microsoft.com/office/drawing/2014/main" id="{18E00A3A-9C26-1B42-A62C-4DB46B741290}"/>
+                <a16:creationId xmlns:a16="http://schemas.microsoft.com/office/drawing/2014/main" id="{FC4F2F47-A164-2C41-A1CD-CFD1AFCBE708}"/>
               </a:ext>
             </a:extLst>
           </p:cNvPr>
@@ -4303,7 +4356,7 @@
           <a:p>
             <a:r>
               <a:rPr lang="en-US" dirty="0"/>
-              <a:t>Decisions we need to make: cohort definition</a:t>
+              <a:t>Decisions we need to make</a:t>
             </a:r>
           </a:p>
         </p:txBody>
@@ -4311,7 +4364,7 @@
     </p:spTree>
     <p:extLst>
       <p:ext uri="{BB962C8B-B14F-4D97-AF65-F5344CB8AC3E}">
-        <p14:creationId xmlns:p14="http://schemas.microsoft.com/office/powerpoint/2010/main" val="3823067349"/>
+        <p14:creationId xmlns:p14="http://schemas.microsoft.com/office/powerpoint/2010/main" val="2244128218"/>
       </p:ext>
     </p:extLst>
   </p:cSld>
@@ -4343,7 +4396,7 @@
           <p:cNvPr id="2" name="Text Placeholder 1">
             <a:extLst>
               <a:ext uri="{FF2B5EF4-FFF2-40B4-BE49-F238E27FC236}">
-                <a16:creationId xmlns:a16="http://schemas.microsoft.com/office/drawing/2014/main" id="{4F90177E-EDBA-BC41-B606-574933A1A307}"/>
+                <a16:creationId xmlns:a16="http://schemas.microsoft.com/office/drawing/2014/main" id="{1BF58D61-D951-4047-914F-96A26849E50A}"/>
               </a:ext>
             </a:extLst>
           </p:cNvPr>
@@ -4361,28 +4414,7 @@
           <a:p>
             <a:r>
               <a:rPr lang="en-US" dirty="0"/>
-              <a:t>What type of analysis are you doing?</a:t>
-            </a:r>
-          </a:p>
-          <a:p>
-            <a:endParaRPr lang="en-US" dirty="0"/>
-          </a:p>
-          <a:p>
-            <a:r>
-              <a:rPr lang="en-US" dirty="0"/>
-              <a:t>What are the relevant entities? How do you identify the cohort?</a:t>
-            </a:r>
-          </a:p>
-          <a:p>
-            <a:pPr marL="114300" indent="0">
-              <a:buNone/>
-            </a:pPr>
-            <a:endParaRPr lang="en-US" dirty="0"/>
-          </a:p>
-          <a:p>
-            <a:r>
-              <a:rPr lang="en-US" dirty="0"/>
-              <a:t>How do you define the outcome/label that you care about?</a:t>
+              <a:t>Every entity that exists?</a:t>
             </a:r>
             <a:br>
               <a:rPr lang="en-US" dirty="0"/>
@@ -4392,21 +4424,33 @@
           <a:p>
             <a:r>
               <a:rPr lang="en-US" dirty="0"/>
-              <a:t>How far into the future are you trying to predict?</a:t>
-            </a:r>
-          </a:p>
-          <a:p>
-            <a:pPr marL="114300" indent="0">
-              <a:buNone/>
-            </a:pPr>
-            <a:br>
-              <a:rPr lang="en-US" dirty="0"/>
-            </a:br>
+              <a:t>“Active” entities?</a:t>
+            </a:r>
             <a:br>
               <a:rPr lang="en-US" dirty="0"/>
             </a:br>
             <a:endParaRPr lang="en-US" dirty="0"/>
           </a:p>
+          <a:p>
+            <a:r>
+              <a:rPr lang="en-US" dirty="0"/>
+              <a:t>Event-based?</a:t>
+            </a:r>
+          </a:p>
+          <a:p>
+            <a:pPr lvl="1"/>
+            <a:r>
+              <a:rPr lang="en-US" dirty="0"/>
+              <a:t>Making predictions when the events occur?</a:t>
+            </a:r>
+          </a:p>
+          <a:p>
+            <a:pPr lvl="1"/>
+            <a:r>
+              <a:rPr lang="en-US" dirty="0"/>
+              <a:t>All entities that have had an event in a certain time window?</a:t>
+            </a:r>
+          </a:p>
         </p:txBody>
       </p:sp>
       <p:sp>
@@ -4414,7 +4458,7 @@
           <p:cNvPr id="3" name="Title 2">
             <a:extLst>
               <a:ext uri="{FF2B5EF4-FFF2-40B4-BE49-F238E27FC236}">
-                <a16:creationId xmlns:a16="http://schemas.microsoft.com/office/drawing/2014/main" id="{FC4F2F47-A164-2C41-A1CD-CFD1AFCBE708}"/>
+                <a16:creationId xmlns:a16="http://schemas.microsoft.com/office/drawing/2014/main" id="{18E00A3A-9C26-1B42-A62C-4DB46B741290}"/>
               </a:ext>
             </a:extLst>
           </p:cNvPr>
@@ -4432,7 +4476,7 @@
           <a:p>
             <a:r>
               <a:rPr lang="en-US" dirty="0"/>
-              <a:t>Decisions we need to make</a:t>
+              <a:t>Decisions we need to make: cohort definition</a:t>
             </a:r>
           </a:p>
         </p:txBody>
@@ -4440,7 +4484,7 @@
     </p:spTree>
     <p:extLst>
       <p:ext uri="{BB962C8B-B14F-4D97-AF65-F5344CB8AC3E}">
-        <p14:creationId xmlns:p14="http://schemas.microsoft.com/office/powerpoint/2010/main" val="140988996"/>
+        <p14:creationId xmlns:p14="http://schemas.microsoft.com/office/powerpoint/2010/main" val="3823067349"/>
       </p:ext>
     </p:extLst>
   </p:cSld>
@@ -4469,6 +4513,135 @@
       </p:grpSpPr>
       <p:sp>
         <p:nvSpPr>
+          <p:cNvPr id="2" name="Text Placeholder 1">
+            <a:extLst>
+              <a:ext uri="{FF2B5EF4-FFF2-40B4-BE49-F238E27FC236}">
+                <a16:creationId xmlns:a16="http://schemas.microsoft.com/office/drawing/2014/main" id="{4F90177E-EDBA-BC41-B606-574933A1A307}"/>
+              </a:ext>
+            </a:extLst>
+          </p:cNvPr>
+          <p:cNvSpPr>
+            <a:spLocks noGrp="1"/>
+          </p:cNvSpPr>
+          <p:nvPr>
+            <p:ph type="body" idx="1"/>
+          </p:nvPr>
+        </p:nvSpPr>
+        <p:spPr/>
+        <p:txBody>
+          <a:bodyPr/>
+          <a:lstStyle/>
+          <a:p>
+            <a:r>
+              <a:rPr lang="en-US" dirty="0"/>
+              <a:t>What type of analysis are you doing?</a:t>
+            </a:r>
+          </a:p>
+          <a:p>
+            <a:endParaRPr lang="en-US" dirty="0"/>
+          </a:p>
+          <a:p>
+            <a:r>
+              <a:rPr lang="en-US" dirty="0"/>
+              <a:t>What are the relevant entities? How do you identify the cohort?</a:t>
+            </a:r>
+          </a:p>
+          <a:p>
+            <a:pPr marL="114300" indent="0">
+              <a:buNone/>
+            </a:pPr>
+            <a:endParaRPr lang="en-US" dirty="0"/>
+          </a:p>
+          <a:p>
+            <a:r>
+              <a:rPr lang="en-US" dirty="0"/>
+              <a:t>How do you define the outcome/label that you care about?</a:t>
+            </a:r>
+            <a:br>
+              <a:rPr lang="en-US" dirty="0"/>
+            </a:br>
+            <a:endParaRPr lang="en-US" dirty="0"/>
+          </a:p>
+          <a:p>
+            <a:r>
+              <a:rPr lang="en-US" dirty="0"/>
+              <a:t>How far into the future are you trying to predict?</a:t>
+            </a:r>
+          </a:p>
+          <a:p>
+            <a:pPr marL="114300" indent="0">
+              <a:buNone/>
+            </a:pPr>
+            <a:br>
+              <a:rPr lang="en-US" dirty="0"/>
+            </a:br>
+            <a:br>
+              <a:rPr lang="en-US" dirty="0"/>
+            </a:br>
+            <a:endParaRPr lang="en-US" dirty="0"/>
+          </a:p>
+        </p:txBody>
+      </p:sp>
+      <p:sp>
+        <p:nvSpPr>
+          <p:cNvPr id="3" name="Title 2">
+            <a:extLst>
+              <a:ext uri="{FF2B5EF4-FFF2-40B4-BE49-F238E27FC236}">
+                <a16:creationId xmlns:a16="http://schemas.microsoft.com/office/drawing/2014/main" id="{FC4F2F47-A164-2C41-A1CD-CFD1AFCBE708}"/>
+              </a:ext>
+            </a:extLst>
+          </p:cNvPr>
+          <p:cNvSpPr>
+            <a:spLocks noGrp="1"/>
+          </p:cNvSpPr>
+          <p:nvPr>
+            <p:ph type="title"/>
+          </p:nvPr>
+        </p:nvSpPr>
+        <p:spPr/>
+        <p:txBody>
+          <a:bodyPr/>
+          <a:lstStyle/>
+          <a:p>
+            <a:r>
+              <a:rPr lang="en-US" dirty="0"/>
+              <a:t>Decisions we need to make</a:t>
+            </a:r>
+          </a:p>
+        </p:txBody>
+      </p:sp>
+    </p:spTree>
+    <p:extLst>
+      <p:ext uri="{BB962C8B-B14F-4D97-AF65-F5344CB8AC3E}">
+        <p14:creationId xmlns:p14="http://schemas.microsoft.com/office/powerpoint/2010/main" val="140988996"/>
+      </p:ext>
+    </p:extLst>
+  </p:cSld>
+  <p:clrMapOvr>
+    <a:masterClrMapping/>
+  </p:clrMapOvr>
+</p:sld>
+</file>
+
+<file path=ppt/slides/slide13.xml><?xml version="1.0" encoding="utf-8"?>
+<p:sld xmlns:a="http://schemas.openxmlformats.org/drawingml/2006/main" xmlns:r="http://schemas.openxmlformats.org/officeDocument/2006/relationships" xmlns:p="http://schemas.openxmlformats.org/presentationml/2006/main">
+  <p:cSld>
+    <p:spTree>
+      <p:nvGrpSpPr>
+        <p:cNvPr id="1" name=""/>
+        <p:cNvGrpSpPr/>
+        <p:nvPr/>
+      </p:nvGrpSpPr>
+      <p:grpSpPr>
+        <a:xfrm>
+          <a:off x="0" y="0"/>
+          <a:ext cx="0" cy="0"/>
+          <a:chOff x="0" y="0"/>
+          <a:chExt cx="0" cy="0"/>
+        </a:xfrm>
+      </p:grpSpPr>
+      <p:sp>
+        <p:nvSpPr>
           <p:cNvPr id="3" name="Title 2">
             <a:extLst>
               <a:ext uri="{FF2B5EF4-FFF2-40B4-BE49-F238E27FC236}">
@@ -4948,7 +5121,7 @@
 </p:sld>
 </file>
 
-<file path=ppt/slides/slide13.xml><?xml version="1.0" encoding="utf-8"?>
+<file path=ppt/slides/slide14.xml><?xml version="1.0" encoding="utf-8"?>
 <p:sld xmlns:a="http://schemas.openxmlformats.org/drawingml/2006/main" xmlns:r="http://schemas.openxmlformats.org/officeDocument/2006/relationships" xmlns:p="http://schemas.openxmlformats.org/presentationml/2006/main">
   <p:cSld>
     <p:spTree>
@@ -5640,7 +5813,7 @@
 </p:sld>
 </file>
 
-<file path=ppt/slides/slide14.xml><?xml version="1.0" encoding="utf-8"?>
+<file path=ppt/slides/slide15.xml><?xml version="1.0" encoding="utf-8"?>
 <p:sld xmlns:a="http://schemas.openxmlformats.org/drawingml/2006/main" xmlns:r="http://schemas.openxmlformats.org/officeDocument/2006/relationships" xmlns:p="http://schemas.openxmlformats.org/presentationml/2006/main">
   <p:cSld>
     <p:spTree>
@@ -5659,31 +5832,6 @@
       </p:grpSpPr>
       <p:sp>
         <p:nvSpPr>
-          <p:cNvPr id="2" name="Text Placeholder 1">
-            <a:extLst>
-              <a:ext uri="{FF2B5EF4-FFF2-40B4-BE49-F238E27FC236}">
-                <a16:creationId xmlns:a16="http://schemas.microsoft.com/office/drawing/2014/main" id="{853D6B69-44D2-D449-B9CE-63D5E2BFE8A0}"/>
-              </a:ext>
-            </a:extLst>
-          </p:cNvPr>
-          <p:cNvSpPr>
-            <a:spLocks noGrp="1"/>
-          </p:cNvSpPr>
-          <p:nvPr>
-            <p:ph type="body" idx="1"/>
-          </p:nvPr>
-        </p:nvSpPr>
-        <p:spPr/>
-        <p:txBody>
-          <a:bodyPr/>
-          <a:lstStyle/>
-          <a:p>
-            <a:endParaRPr lang="en-US"/>
-          </a:p>
-        </p:txBody>
-      </p:sp>
-      <p:sp>
-        <p:nvSpPr>
           <p:cNvPr id="3" name="Title 2">
             <a:extLst>
               <a:ext uri="{FF2B5EF4-FFF2-40B4-BE49-F238E27FC236}">
@@ -5710,70 +5858,12 @@
           </a:p>
         </p:txBody>
       </p:sp>
-    </p:spTree>
-    <p:extLst>
-      <p:ext uri="{BB962C8B-B14F-4D97-AF65-F5344CB8AC3E}">
-        <p14:creationId xmlns:p14="http://schemas.microsoft.com/office/powerpoint/2010/main" val="821576765"/>
-      </p:ext>
-    </p:extLst>
-  </p:cSld>
-  <p:clrMapOvr>
-    <a:masterClrMapping/>
-  </p:clrMapOvr>
-</p:sld>
-</file>
-
-<file path=ppt/slides/slide15.xml><?xml version="1.0" encoding="utf-8"?>
-<p:sld xmlns:a="http://schemas.openxmlformats.org/drawingml/2006/main" xmlns:r="http://schemas.openxmlformats.org/officeDocument/2006/relationships" xmlns:p="http://schemas.openxmlformats.org/presentationml/2006/main" show="0">
-  <p:cSld>
-    <p:spTree>
-      <p:nvGrpSpPr>
-        <p:cNvPr id="1" name=""/>
-        <p:cNvGrpSpPr/>
-        <p:nvPr/>
-      </p:nvGrpSpPr>
-      <p:grpSpPr>
-        <a:xfrm>
-          <a:off x="0" y="0"/>
-          <a:ext cx="0" cy="0"/>
-          <a:chOff x="0" y="0"/>
-          <a:chExt cx="0" cy="0"/>
-        </a:xfrm>
-      </p:grpSpPr>
-      <p:sp>
-        <p:nvSpPr>
-          <p:cNvPr id="3" name="Title 2">
-            <a:extLst>
-              <a:ext uri="{FF2B5EF4-FFF2-40B4-BE49-F238E27FC236}">
-                <a16:creationId xmlns:a16="http://schemas.microsoft.com/office/drawing/2014/main" id="{D3765B02-360A-1F41-913A-E71E561203CC}"/>
-              </a:ext>
-            </a:extLst>
-          </p:cNvPr>
-          <p:cNvSpPr>
-            <a:spLocks noGrp="1"/>
-          </p:cNvSpPr>
-          <p:nvPr>
-            <p:ph type="title"/>
-          </p:nvPr>
-        </p:nvSpPr>
-        <p:spPr/>
-        <p:txBody>
-          <a:bodyPr/>
-          <a:lstStyle/>
-          <a:p>
-            <a:r>
-              <a:rPr lang="en-US" dirty="0"/>
-              <a:t>Analytical Formulation Examples</a:t>
-            </a:r>
-          </a:p>
-        </p:txBody>
-      </p:sp>
       <p:sp>
         <p:nvSpPr>
           <p:cNvPr id="4" name="Google Shape;173;p42">
             <a:extLst>
               <a:ext uri="{FF2B5EF4-FFF2-40B4-BE49-F238E27FC236}">
-                <a16:creationId xmlns:a16="http://schemas.microsoft.com/office/drawing/2014/main" id="{14B1256E-D155-A94C-946A-73C5698C162F}"/>
+                <a16:creationId xmlns:a16="http://schemas.microsoft.com/office/drawing/2014/main" id="{11008A05-00C0-7C4B-9E7A-F5D9E79C776A}"/>
               </a:ext>
             </a:extLst>
           </p:cNvPr>
@@ -5825,7 +5915,7 @@
           <p:cNvPr id="5" name="Google Shape;175;p42">
             <a:extLst>
               <a:ext uri="{FF2B5EF4-FFF2-40B4-BE49-F238E27FC236}">
-                <a16:creationId xmlns:a16="http://schemas.microsoft.com/office/drawing/2014/main" id="{3DB02F29-727A-394F-827F-060277C7B494}"/>
+                <a16:creationId xmlns:a16="http://schemas.microsoft.com/office/drawing/2014/main" id="{A503C09B-93C0-FB43-BCF8-DB719EF203C3}"/>
               </a:ext>
             </a:extLst>
           </p:cNvPr>
@@ -5861,62 +5951,62 @@
               <a:buNone/>
             </a:pPr>
             <a:r>
-              <a:rPr lang="en" sz="2200">
+              <a:rPr lang="en" sz="2600" dirty="0">
                 <a:solidFill>
                   <a:srgbClr val="FF0000"/>
                 </a:solidFill>
               </a:rPr>
-              <a:t>On the first of every month</a:t>
-            </a:r>
-            <a:r>
-              <a:rPr lang="en" sz="2200"/>
+              <a:t>At every primary care appointment</a:t>
+            </a:r>
+            <a:r>
+              <a:rPr lang="en" sz="2600" dirty="0"/>
               <a:t>, for </a:t>
             </a:r>
             <a:r>
-              <a:rPr lang="en" sz="2200">
+              <a:rPr lang="en" sz="2600" dirty="0">
                 <a:solidFill>
                   <a:srgbClr val="0000FF"/>
                 </a:solidFill>
               </a:rPr>
-              <a:t>all the individuals who have been released from Johnson County Jail during the past 2 years and have demonstrated mental health needs</a:t>
-            </a:r>
-            <a:r>
-              <a:rPr lang="en" sz="2200"/>
+              <a:t>all patients over the age of 25</a:t>
+            </a:r>
+            <a:r>
+              <a:rPr lang="en" sz="2600" dirty="0"/>
               <a:t>, can we identify the </a:t>
             </a:r>
             <a:r>
-              <a:rPr lang="en" sz="2200">
+              <a:rPr lang="en" sz="2600" dirty="0">
                 <a:solidFill>
                   <a:srgbClr val="FF00FF"/>
                 </a:solidFill>
               </a:rPr>
-              <a:t>200 highest risk individuals</a:t>
-            </a:r>
-            <a:r>
-              <a:rPr lang="en" sz="2200"/>
-              <a:t> who are </a:t>
-            </a:r>
-            <a:r>
-              <a:rPr lang="en" sz="2200">
+              <a:t>individuals at least 80% likely</a:t>
+            </a:r>
+            <a:r>
+              <a:rPr lang="en" sz="2600" dirty="0"/>
+              <a:t> </a:t>
+            </a:r>
+            <a:r>
+              <a:rPr lang="en" sz="2600" dirty="0">
                 <a:solidFill>
                   <a:srgbClr val="38761D"/>
                 </a:solidFill>
               </a:rPr>
-              <a:t>likely to return to jail in the next 6 months </a:t>
-            </a:r>
-            <a:r>
-              <a:rPr lang="en" sz="2200">
+              <a:t>to develop diabetes in the next 3 years </a:t>
+            </a:r>
+            <a:r>
+              <a:rPr lang="en" sz="2600" dirty="0">
                 <a:solidFill>
                   <a:srgbClr val="B45F06"/>
                 </a:solidFill>
               </a:rPr>
-              <a:t>to prioritize for proactive mental health interventions</a:t>
-            </a:r>
-            <a:r>
-              <a:rPr lang="en" sz="2200"/>
+              <a:t>to prioritize for early screening</a:t>
+            </a:r>
+            <a:r>
+              <a:rPr lang="en" sz="2600" dirty="0"/>
               <a:t>?</a:t>
             </a:r>
-            <a:endParaRPr sz="2200"/>
+            <a:endParaRPr sz="2600" dirty="0"/>
           </a:p>
         </p:txBody>
       </p:sp>
@@ -5925,7 +6015,7 @@
           <p:cNvPr id="6" name="Google Shape;176;p42">
             <a:extLst>
               <a:ext uri="{FF2B5EF4-FFF2-40B4-BE49-F238E27FC236}">
-                <a16:creationId xmlns:a16="http://schemas.microsoft.com/office/drawing/2014/main" id="{96C50709-9A9E-324E-8E39-7DE46030D63F}"/>
+                <a16:creationId xmlns:a16="http://schemas.microsoft.com/office/drawing/2014/main" id="{37D6DBA9-5D69-154C-A120-4ADBF03F7CF7}"/>
               </a:ext>
             </a:extLst>
           </p:cNvPr>
@@ -5981,7 +6071,7 @@
           <p:cNvPr id="7" name="Google Shape;177;p42">
             <a:extLst>
               <a:ext uri="{FF2B5EF4-FFF2-40B4-BE49-F238E27FC236}">
-                <a16:creationId xmlns:a16="http://schemas.microsoft.com/office/drawing/2014/main" id="{D58617F3-981C-F344-866D-8BB5BAA60B03}"/>
+                <a16:creationId xmlns:a16="http://schemas.microsoft.com/office/drawing/2014/main" id="{6A2D549C-59C2-0340-9130-F3B04EEF3F59}"/>
               </a:ext>
             </a:extLst>
           </p:cNvPr>
@@ -6037,7 +6127,7 @@
           <p:cNvPr id="8" name="Google Shape;178;p42">
             <a:extLst>
               <a:ext uri="{FF2B5EF4-FFF2-40B4-BE49-F238E27FC236}">
-                <a16:creationId xmlns:a16="http://schemas.microsoft.com/office/drawing/2014/main" id="{C08439B6-F437-E346-AB04-4CB62D828B18}"/>
+                <a16:creationId xmlns:a16="http://schemas.microsoft.com/office/drawing/2014/main" id="{A7B784C6-E226-7546-90BA-7A3243A70F6B}"/>
               </a:ext>
             </a:extLst>
           </p:cNvPr>
@@ -6093,7 +6183,7 @@
           <p:cNvPr id="9" name="Google Shape;179;p42">
             <a:extLst>
               <a:ext uri="{FF2B5EF4-FFF2-40B4-BE49-F238E27FC236}">
-                <a16:creationId xmlns:a16="http://schemas.microsoft.com/office/drawing/2014/main" id="{879C4375-7810-EC44-9BE6-A9A6D6D223F2}"/>
+                <a16:creationId xmlns:a16="http://schemas.microsoft.com/office/drawing/2014/main" id="{0D4F98CB-D85C-3F48-A552-B472AA7D6F71}"/>
               </a:ext>
             </a:extLst>
           </p:cNvPr>
@@ -6187,7 +6277,7 @@
     </p:spTree>
     <p:extLst>
       <p:ext uri="{BB962C8B-B14F-4D97-AF65-F5344CB8AC3E}">
-        <p14:creationId xmlns:p14="http://schemas.microsoft.com/office/powerpoint/2010/main" val="3031715212"/>
+        <p14:creationId xmlns:p14="http://schemas.microsoft.com/office/powerpoint/2010/main" val="712266217"/>
       </p:ext>
     </p:extLst>
   </p:cSld>
@@ -6290,7 +6380,7 @@
               </a:spcAft>
               <a:buNone/>
             </a:pPr>
-            <a:endParaRPr/>
+            <a:endParaRPr sz="1600"/>
           </a:p>
         </p:txBody>
       </p:sp>
@@ -6325,7 +6415,7 @@
           </a:bodyPr>
           <a:lstStyle/>
           <a:p>
-            <a:pPr marL="0" lvl="0" indent="0" algn="l" rtl="0">
+            <a:pPr marL="0" lvl="0" indent="0">
               <a:spcBef>
                 <a:spcPts val="0"/>
               </a:spcBef>
@@ -6335,62 +6425,62 @@
               <a:buNone/>
             </a:pPr>
             <a:r>
-              <a:rPr lang="en" sz="2600" dirty="0">
+              <a:rPr lang="en" sz="2800" dirty="0">
                 <a:solidFill>
                   <a:srgbClr val="FF0000"/>
                 </a:solidFill>
               </a:rPr>
-              <a:t>At every primary care appointment</a:t>
-            </a:r>
-            <a:r>
-              <a:rPr lang="en" sz="2600" dirty="0"/>
+              <a:t>Every Monday</a:t>
+            </a:r>
+            <a:r>
+              <a:rPr lang="en" sz="2800" dirty="0"/>
               <a:t>, for </a:t>
             </a:r>
             <a:r>
-              <a:rPr lang="en" sz="2600" dirty="0">
+              <a:rPr lang="en" sz="2800" dirty="0">
                 <a:solidFill>
                   <a:srgbClr val="0000FF"/>
                 </a:solidFill>
               </a:rPr>
-              <a:t>all patients over the age of 25</a:t>
-            </a:r>
-            <a:r>
-              <a:rPr lang="en" sz="2600" dirty="0"/>
+              <a:t>current Netflix subscribers</a:t>
+            </a:r>
+            <a:r>
+              <a:rPr lang="en" sz="2800" dirty="0"/>
               <a:t>, can we identify the </a:t>
             </a:r>
             <a:r>
-              <a:rPr lang="en" sz="2600" dirty="0">
+              <a:rPr lang="en" sz="2800" dirty="0">
                 <a:solidFill>
                   <a:srgbClr val="FF00FF"/>
                 </a:solidFill>
               </a:rPr>
-              <a:t>individuals at least 80% likely</a:t>
-            </a:r>
-            <a:r>
-              <a:rPr lang="en" sz="2600" dirty="0"/>
+              <a:t>10 pieces of content</a:t>
+            </a:r>
+            <a:r>
+              <a:rPr lang="en" sz="2800" dirty="0"/>
               <a:t> </a:t>
             </a:r>
             <a:r>
-              <a:rPr lang="en" sz="2600" dirty="0">
+              <a:rPr lang="en" sz="2800" dirty="0">
                 <a:solidFill>
                   <a:srgbClr val="38761D"/>
                 </a:solidFill>
               </a:rPr>
-              <a:t>to develop diabetes in the next 3 years </a:t>
-            </a:r>
-            <a:r>
-              <a:rPr lang="en" sz="2600" dirty="0">
+              <a:t>with highest engagement </a:t>
+            </a:r>
+            <a:r>
+              <a:rPr lang="en" sz="2800" dirty="0">
                 <a:solidFill>
                   <a:srgbClr val="B45F06"/>
                 </a:solidFill>
               </a:rPr>
-              <a:t>to prioritize for early screening</a:t>
-            </a:r>
-            <a:r>
-              <a:rPr lang="en" sz="2600" dirty="0"/>
+              <a:t>to prioritize for suggested viewing in the following week</a:t>
+            </a:r>
+            <a:r>
+              <a:rPr lang="en" sz="2800" dirty="0"/>
               <a:t>?</a:t>
             </a:r>
-            <a:endParaRPr sz="2600" dirty="0"/>
+            <a:endParaRPr sz="2800" dirty="0"/>
           </a:p>
         </p:txBody>
       </p:sp>
@@ -6435,14 +6525,14 @@
               <a:buNone/>
             </a:pPr>
             <a:r>
-              <a:rPr lang="en">
+              <a:rPr lang="en" sz="1600" dirty="0">
                 <a:solidFill>
                   <a:srgbClr val="FF0000"/>
                 </a:solidFill>
               </a:rPr>
               <a:t>How often is the recommendation/decision being made?</a:t>
             </a:r>
-            <a:endParaRPr>
+            <a:endParaRPr sz="1600" dirty="0">
               <a:solidFill>
                 <a:srgbClr val="FF0000"/>
               </a:solidFill>
@@ -6491,14 +6581,14 @@
               <a:buNone/>
             </a:pPr>
             <a:r>
-              <a:rPr lang="en">
+              <a:rPr lang="en" sz="1600">
                 <a:solidFill>
                   <a:srgbClr val="0000FF"/>
                 </a:solidFill>
               </a:rPr>
               <a:t>Who/what is included in the cohort?</a:t>
             </a:r>
-            <a:endParaRPr>
+            <a:endParaRPr sz="1600">
               <a:solidFill>
                 <a:srgbClr val="0000FF"/>
               </a:solidFill>
@@ -6547,14 +6637,14 @@
               <a:buNone/>
             </a:pPr>
             <a:r>
-              <a:rPr lang="en">
+              <a:rPr lang="en" sz="1600">
                 <a:solidFill>
                   <a:srgbClr val="FF00FF"/>
                 </a:solidFill>
               </a:rPr>
               <a:t>What is the output?</a:t>
             </a:r>
-            <a:endParaRPr>
+            <a:endParaRPr sz="1600">
               <a:solidFill>
                 <a:srgbClr val="FF00FF"/>
               </a:solidFill>
@@ -6603,14 +6693,14 @@
               <a:buNone/>
             </a:pPr>
             <a:r>
-              <a:rPr lang="en">
+              <a:rPr lang="en" sz="1600" dirty="0">
                 <a:solidFill>
                   <a:srgbClr val="274E13"/>
                 </a:solidFill>
               </a:rPr>
               <a:t>What outcome are you predicting/estimating?</a:t>
             </a:r>
-            <a:endParaRPr>
+            <a:endParaRPr sz="1600" dirty="0">
               <a:solidFill>
                 <a:srgbClr val="274E13"/>
               </a:solidFill>
@@ -6626,7 +6716,7 @@
               </a:spcAft>
               <a:buNone/>
             </a:pPr>
-            <a:endParaRPr>
+            <a:endParaRPr sz="1600" dirty="0">
               <a:solidFill>
                 <a:srgbClr val="274E13"/>
               </a:solidFill>
@@ -6643,488 +6733,14 @@
               <a:buNone/>
             </a:pPr>
             <a:r>
-              <a:rPr lang="en">
+              <a:rPr lang="en" sz="1600" dirty="0">
                 <a:solidFill>
                   <a:srgbClr val="B45F06"/>
                 </a:solidFill>
               </a:rPr>
               <a:t>For what purpose?</a:t>
             </a:r>
-            <a:endParaRPr>
-              <a:solidFill>
-                <a:srgbClr val="274E13"/>
-              </a:solidFill>
-            </a:endParaRPr>
-          </a:p>
-        </p:txBody>
-      </p:sp>
-    </p:spTree>
-    <p:extLst>
-      <p:ext uri="{BB962C8B-B14F-4D97-AF65-F5344CB8AC3E}">
-        <p14:creationId xmlns:p14="http://schemas.microsoft.com/office/powerpoint/2010/main" val="712266217"/>
-      </p:ext>
-    </p:extLst>
-  </p:cSld>
-  <p:clrMapOvr>
-    <a:masterClrMapping/>
-  </p:clrMapOvr>
-</p:sld>
-</file>
-
-<file path=ppt/slides/slide17.xml><?xml version="1.0" encoding="utf-8"?>
-<p:sld xmlns:a="http://schemas.openxmlformats.org/drawingml/2006/main" xmlns:r="http://schemas.openxmlformats.org/officeDocument/2006/relationships" xmlns:p="http://schemas.openxmlformats.org/presentationml/2006/main">
-  <p:cSld>
-    <p:spTree>
-      <p:nvGrpSpPr>
-        <p:cNvPr id="1" name=""/>
-        <p:cNvGrpSpPr/>
-        <p:nvPr/>
-      </p:nvGrpSpPr>
-      <p:grpSpPr>
-        <a:xfrm>
-          <a:off x="0" y="0"/>
-          <a:ext cx="0" cy="0"/>
-          <a:chOff x="0" y="0"/>
-          <a:chExt cx="0" cy="0"/>
-        </a:xfrm>
-      </p:grpSpPr>
-      <p:sp>
-        <p:nvSpPr>
-          <p:cNvPr id="3" name="Title 2">
-            <a:extLst>
-              <a:ext uri="{FF2B5EF4-FFF2-40B4-BE49-F238E27FC236}">
-                <a16:creationId xmlns:a16="http://schemas.microsoft.com/office/drawing/2014/main" id="{D3765B02-360A-1F41-913A-E71E561203CC}"/>
-              </a:ext>
-            </a:extLst>
-          </p:cNvPr>
-          <p:cNvSpPr>
-            <a:spLocks noGrp="1"/>
-          </p:cNvSpPr>
-          <p:nvPr>
-            <p:ph type="title"/>
-          </p:nvPr>
-        </p:nvSpPr>
-        <p:spPr/>
-        <p:txBody>
-          <a:bodyPr/>
-          <a:lstStyle/>
-          <a:p>
-            <a:r>
-              <a:rPr lang="en-US" dirty="0"/>
-              <a:t>Analytical Formulation Examples</a:t>
-            </a:r>
-          </a:p>
-        </p:txBody>
-      </p:sp>
-      <p:sp>
-        <p:nvSpPr>
-          <p:cNvPr id="4" name="Google Shape;173;p42">
-            <a:extLst>
-              <a:ext uri="{FF2B5EF4-FFF2-40B4-BE49-F238E27FC236}">
-                <a16:creationId xmlns:a16="http://schemas.microsoft.com/office/drawing/2014/main" id="{11008A05-00C0-7C4B-9E7A-F5D9E79C776A}"/>
-              </a:ext>
-            </a:extLst>
-          </p:cNvPr>
-          <p:cNvSpPr/>
-          <p:nvPr/>
-        </p:nvSpPr>
-        <p:spPr>
-          <a:xfrm>
-            <a:off x="1688840" y="2398130"/>
-            <a:ext cx="2343000" cy="3153300"/>
-          </a:xfrm>
-          <a:prstGeom prst="rect">
-            <a:avLst/>
-          </a:prstGeom>
-          <a:solidFill>
-            <a:schemeClr val="lt2"/>
-          </a:solidFill>
-          <a:ln w="9525" cap="flat" cmpd="sng">
-            <a:solidFill>
-              <a:schemeClr val="dk2"/>
-            </a:solidFill>
-            <a:prstDash val="solid"/>
-            <a:round/>
-            <a:headEnd type="none" w="sm" len="sm"/>
-            <a:tailEnd type="none" w="sm" len="sm"/>
-          </a:ln>
-        </p:spPr>
-        <p:txBody>
-          <a:bodyPr spcFirstLastPara="1" wrap="square" lIns="91425" tIns="91425" rIns="91425" bIns="91425" anchor="ctr" anchorCtr="0">
-            <a:noAutofit/>
-          </a:bodyPr>
-          <a:lstStyle/>
-          <a:p>
-            <a:pPr marL="0" lvl="0" indent="0" algn="l" rtl="0">
-              <a:spcBef>
-                <a:spcPts val="0"/>
-              </a:spcBef>
-              <a:spcAft>
-                <a:spcPts val="0"/>
-              </a:spcAft>
-              <a:buNone/>
-            </a:pPr>
-            <a:endParaRPr/>
-          </a:p>
-        </p:txBody>
-      </p:sp>
-      <p:sp>
-        <p:nvSpPr>
-          <p:cNvPr id="5" name="Google Shape;175;p42">
-            <a:extLst>
-              <a:ext uri="{FF2B5EF4-FFF2-40B4-BE49-F238E27FC236}">
-                <a16:creationId xmlns:a16="http://schemas.microsoft.com/office/drawing/2014/main" id="{A503C09B-93C0-FB43-BCF8-DB719EF203C3}"/>
-              </a:ext>
-            </a:extLst>
-          </p:cNvPr>
-          <p:cNvSpPr txBox="1">
-            <a:spLocks noGrp="1"/>
-          </p:cNvSpPr>
-          <p:nvPr>
-            <p:ph type="body" idx="1"/>
-          </p:nvPr>
-        </p:nvSpPr>
-        <p:spPr>
-          <a:xfrm>
-            <a:off x="4220940" y="2306905"/>
-            <a:ext cx="6398400" cy="3416400"/>
-          </a:xfrm>
-          <a:prstGeom prst="rect">
-            <a:avLst/>
-          </a:prstGeom>
-        </p:spPr>
-        <p:txBody>
-          <a:bodyPr spcFirstLastPara="1" wrap="square" lIns="91425" tIns="91425" rIns="91425" bIns="91425" anchor="t" anchorCtr="0">
-            <a:noAutofit/>
-          </a:bodyPr>
-          <a:lstStyle/>
-          <a:p>
-            <a:pPr marL="0" lvl="0" indent="0">
-              <a:spcBef>
-                <a:spcPts val="0"/>
-              </a:spcBef>
-              <a:spcAft>
-                <a:spcPts val="1600"/>
-              </a:spcAft>
-              <a:buNone/>
-            </a:pPr>
-            <a:r>
-              <a:rPr lang="en" sz="2600" dirty="0">
-                <a:solidFill>
-                  <a:srgbClr val="FF0000"/>
-                </a:solidFill>
-              </a:rPr>
-              <a:t>Every Monday</a:t>
-            </a:r>
-            <a:r>
-              <a:rPr lang="en" sz="2600" dirty="0"/>
-              <a:t>, for </a:t>
-            </a:r>
-            <a:r>
-              <a:rPr lang="en" sz="2600" dirty="0">
-                <a:solidFill>
-                  <a:srgbClr val="0000FF"/>
-                </a:solidFill>
-              </a:rPr>
-              <a:t>current Netflix subscribers</a:t>
-            </a:r>
-            <a:r>
-              <a:rPr lang="en" sz="2600" dirty="0"/>
-              <a:t>, can we identify the </a:t>
-            </a:r>
-            <a:r>
-              <a:rPr lang="en" sz="2600" dirty="0">
-                <a:solidFill>
-                  <a:srgbClr val="FF00FF"/>
-                </a:solidFill>
-              </a:rPr>
-              <a:t>10 pieces of content</a:t>
-            </a:r>
-            <a:r>
-              <a:rPr lang="en" sz="2600" dirty="0"/>
-              <a:t> </a:t>
-            </a:r>
-            <a:r>
-              <a:rPr lang="en" sz="2600" dirty="0">
-                <a:solidFill>
-                  <a:srgbClr val="38761D"/>
-                </a:solidFill>
-              </a:rPr>
-              <a:t>with highest expected revenue </a:t>
-            </a:r>
-            <a:r>
-              <a:rPr lang="en" sz="2600" dirty="0">
-                <a:solidFill>
-                  <a:srgbClr val="B45F06"/>
-                </a:solidFill>
-              </a:rPr>
-              <a:t>to prioritize for suggested viewing in the following week</a:t>
-            </a:r>
-            <a:r>
-              <a:rPr lang="en" sz="2600" dirty="0"/>
-              <a:t>?</a:t>
-            </a:r>
-            <a:endParaRPr sz="2600" dirty="0"/>
-          </a:p>
-        </p:txBody>
-      </p:sp>
-      <p:sp>
-        <p:nvSpPr>
-          <p:cNvPr id="6" name="Google Shape;176;p42">
-            <a:extLst>
-              <a:ext uri="{FF2B5EF4-FFF2-40B4-BE49-F238E27FC236}">
-                <a16:creationId xmlns:a16="http://schemas.microsoft.com/office/drawing/2014/main" id="{37D6DBA9-5D69-154C-A120-4ADBF03F7CF7}"/>
-              </a:ext>
-            </a:extLst>
-          </p:cNvPr>
-          <p:cNvSpPr txBox="1"/>
-          <p:nvPr/>
-        </p:nvSpPr>
-        <p:spPr>
-          <a:xfrm>
-            <a:off x="1732190" y="2398130"/>
-            <a:ext cx="2256300" cy="597000"/>
-          </a:xfrm>
-          <a:prstGeom prst="rect">
-            <a:avLst/>
-          </a:prstGeom>
-          <a:noFill/>
-          <a:ln>
-            <a:noFill/>
-          </a:ln>
-        </p:spPr>
-        <p:txBody>
-          <a:bodyPr spcFirstLastPara="1" wrap="square" lIns="91425" tIns="91425" rIns="91425" bIns="91425" anchor="t" anchorCtr="0">
-            <a:noAutofit/>
-          </a:bodyPr>
-          <a:lstStyle/>
-          <a:p>
-            <a:pPr marL="0" lvl="0" indent="0" algn="l" rtl="0">
-              <a:spcBef>
-                <a:spcPts val="0"/>
-              </a:spcBef>
-              <a:spcAft>
-                <a:spcPts val="0"/>
-              </a:spcAft>
-              <a:buNone/>
-            </a:pPr>
-            <a:r>
-              <a:rPr lang="en">
-                <a:solidFill>
-                  <a:srgbClr val="FF0000"/>
-                </a:solidFill>
-              </a:rPr>
-              <a:t>How often is the recommendation/decision being made?</a:t>
-            </a:r>
-            <a:endParaRPr>
-              <a:solidFill>
-                <a:srgbClr val="FF0000"/>
-              </a:solidFill>
-            </a:endParaRPr>
-          </a:p>
-        </p:txBody>
-      </p:sp>
-      <p:sp>
-        <p:nvSpPr>
-          <p:cNvPr id="7" name="Google Shape;177;p42">
-            <a:extLst>
-              <a:ext uri="{FF2B5EF4-FFF2-40B4-BE49-F238E27FC236}">
-                <a16:creationId xmlns:a16="http://schemas.microsoft.com/office/drawing/2014/main" id="{6A2D549C-59C2-0340-9130-F3B04EEF3F59}"/>
-              </a:ext>
-            </a:extLst>
-          </p:cNvPr>
-          <p:cNvSpPr txBox="1"/>
-          <p:nvPr/>
-        </p:nvSpPr>
-        <p:spPr>
-          <a:xfrm>
-            <a:off x="1736040" y="3275280"/>
-            <a:ext cx="2256300" cy="597000"/>
-          </a:xfrm>
-          <a:prstGeom prst="rect">
-            <a:avLst/>
-          </a:prstGeom>
-          <a:noFill/>
-          <a:ln>
-            <a:noFill/>
-          </a:ln>
-        </p:spPr>
-        <p:txBody>
-          <a:bodyPr spcFirstLastPara="1" wrap="square" lIns="91425" tIns="91425" rIns="91425" bIns="91425" anchor="t" anchorCtr="0">
-            <a:noAutofit/>
-          </a:bodyPr>
-          <a:lstStyle/>
-          <a:p>
-            <a:pPr marL="0" lvl="0" indent="0" algn="l" rtl="0">
-              <a:spcBef>
-                <a:spcPts val="0"/>
-              </a:spcBef>
-              <a:spcAft>
-                <a:spcPts val="0"/>
-              </a:spcAft>
-              <a:buNone/>
-            </a:pPr>
-            <a:r>
-              <a:rPr lang="en">
-                <a:solidFill>
-                  <a:srgbClr val="0000FF"/>
-                </a:solidFill>
-              </a:rPr>
-              <a:t>Who/what is included in the cohort?</a:t>
-            </a:r>
-            <a:endParaRPr>
-              <a:solidFill>
-                <a:srgbClr val="0000FF"/>
-              </a:solidFill>
-            </a:endParaRPr>
-          </a:p>
-        </p:txBody>
-      </p:sp>
-      <p:sp>
-        <p:nvSpPr>
-          <p:cNvPr id="8" name="Google Shape;178;p42">
-            <a:extLst>
-              <a:ext uri="{FF2B5EF4-FFF2-40B4-BE49-F238E27FC236}">
-                <a16:creationId xmlns:a16="http://schemas.microsoft.com/office/drawing/2014/main" id="{A7B784C6-E226-7546-90BA-7A3243A70F6B}"/>
-              </a:ext>
-            </a:extLst>
-          </p:cNvPr>
-          <p:cNvSpPr txBox="1"/>
-          <p:nvPr/>
-        </p:nvSpPr>
-        <p:spPr>
-          <a:xfrm>
-            <a:off x="1736040" y="3923830"/>
-            <a:ext cx="2256300" cy="597000"/>
-          </a:xfrm>
-          <a:prstGeom prst="rect">
-            <a:avLst/>
-          </a:prstGeom>
-          <a:noFill/>
-          <a:ln>
-            <a:noFill/>
-          </a:ln>
-        </p:spPr>
-        <p:txBody>
-          <a:bodyPr spcFirstLastPara="1" wrap="square" lIns="91425" tIns="91425" rIns="91425" bIns="91425" anchor="t" anchorCtr="0">
-            <a:noAutofit/>
-          </a:bodyPr>
-          <a:lstStyle/>
-          <a:p>
-            <a:pPr marL="0" lvl="0" indent="0" algn="l" rtl="0">
-              <a:spcBef>
-                <a:spcPts val="0"/>
-              </a:spcBef>
-              <a:spcAft>
-                <a:spcPts val="0"/>
-              </a:spcAft>
-              <a:buNone/>
-            </a:pPr>
-            <a:r>
-              <a:rPr lang="en">
-                <a:solidFill>
-                  <a:srgbClr val="FF00FF"/>
-                </a:solidFill>
-              </a:rPr>
-              <a:t>What is the output?</a:t>
-            </a:r>
-            <a:endParaRPr>
-              <a:solidFill>
-                <a:srgbClr val="FF00FF"/>
-              </a:solidFill>
-            </a:endParaRPr>
-          </a:p>
-        </p:txBody>
-      </p:sp>
-      <p:sp>
-        <p:nvSpPr>
-          <p:cNvPr id="9" name="Google Shape;179;p42">
-            <a:extLst>
-              <a:ext uri="{FF2B5EF4-FFF2-40B4-BE49-F238E27FC236}">
-                <a16:creationId xmlns:a16="http://schemas.microsoft.com/office/drawing/2014/main" id="{0D4F98CB-D85C-3F48-A552-B472AA7D6F71}"/>
-              </a:ext>
-            </a:extLst>
-          </p:cNvPr>
-          <p:cNvSpPr txBox="1"/>
-          <p:nvPr/>
-        </p:nvSpPr>
-        <p:spPr>
-          <a:xfrm>
-            <a:off x="1732190" y="4444630"/>
-            <a:ext cx="2256300" cy="1106700"/>
-          </a:xfrm>
-          <a:prstGeom prst="rect">
-            <a:avLst/>
-          </a:prstGeom>
-          <a:noFill/>
-          <a:ln>
-            <a:noFill/>
-          </a:ln>
-        </p:spPr>
-        <p:txBody>
-          <a:bodyPr spcFirstLastPara="1" wrap="square" lIns="91425" tIns="91425" rIns="91425" bIns="91425" anchor="t" anchorCtr="0">
-            <a:noAutofit/>
-          </a:bodyPr>
-          <a:lstStyle/>
-          <a:p>
-            <a:pPr marL="0" lvl="0" indent="0" algn="l" rtl="0">
-              <a:spcBef>
-                <a:spcPts val="0"/>
-              </a:spcBef>
-              <a:spcAft>
-                <a:spcPts val="0"/>
-              </a:spcAft>
-              <a:buNone/>
-            </a:pPr>
-            <a:r>
-              <a:rPr lang="en">
-                <a:solidFill>
-                  <a:srgbClr val="274E13"/>
-                </a:solidFill>
-              </a:rPr>
-              <a:t>What outcome are you predicting/estimating?</a:t>
-            </a:r>
-            <a:endParaRPr>
-              <a:solidFill>
-                <a:srgbClr val="274E13"/>
-              </a:solidFill>
-            </a:endParaRPr>
-          </a:p>
-          <a:p>
-            <a:pPr marL="0" lvl="0" indent="0" algn="l" rtl="0">
-              <a:spcBef>
-                <a:spcPts val="0"/>
-              </a:spcBef>
-              <a:spcAft>
-                <a:spcPts val="0"/>
-              </a:spcAft>
-              <a:buNone/>
-            </a:pPr>
-            <a:endParaRPr>
-              <a:solidFill>
-                <a:srgbClr val="274E13"/>
-              </a:solidFill>
-            </a:endParaRPr>
-          </a:p>
-          <a:p>
-            <a:pPr marL="0" lvl="0" indent="0" algn="l" rtl="0">
-              <a:spcBef>
-                <a:spcPts val="0"/>
-              </a:spcBef>
-              <a:spcAft>
-                <a:spcPts val="0"/>
-              </a:spcAft>
-              <a:buNone/>
-            </a:pPr>
-            <a:r>
-              <a:rPr lang="en">
-                <a:solidFill>
-                  <a:srgbClr val="B45F06"/>
-                </a:solidFill>
-              </a:rPr>
-              <a:t>For what purpose?</a:t>
-            </a:r>
-            <a:endParaRPr>
+            <a:endParaRPr sz="1600" dirty="0">
               <a:solidFill>
                 <a:srgbClr val="274E13"/>
               </a:solidFill>
@@ -7145,7 +6761,7 @@
 </p:sld>
 </file>
 
-<file path=ppt/slides/slide18.xml><?xml version="1.0" encoding="utf-8"?>
+<file path=ppt/slides/slide17.xml><?xml version="1.0" encoding="utf-8"?>
 <p:sld xmlns:a="http://schemas.openxmlformats.org/drawingml/2006/main" xmlns:r="http://schemas.openxmlformats.org/officeDocument/2006/relationships" xmlns:p="http://schemas.openxmlformats.org/presentationml/2006/main">
   <p:cSld>
     <p:spTree>
@@ -7597,7 +7213,7 @@
 </p:sld>
 </file>
 
-<file path=ppt/slides/slide19.xml><?xml version="1.0" encoding="utf-8"?>
+<file path=ppt/slides/slide18.xml><?xml version="1.0" encoding="utf-8"?>
 <p:sld xmlns:a="http://schemas.openxmlformats.org/drawingml/2006/main" xmlns:r="http://schemas.openxmlformats.org/officeDocument/2006/relationships" xmlns:p="http://schemas.openxmlformats.org/presentationml/2006/main">
   <p:cSld>
     <p:spTree>
@@ -8002,6 +7618,480 @@
       <p:sp>
         <p:nvSpPr>
           <p:cNvPr id="209" name="Google Shape;209;p38"/>
+          <p:cNvSpPr txBox="1"/>
+          <p:nvPr/>
+        </p:nvSpPr>
+        <p:spPr>
+          <a:xfrm>
+            <a:off x="248120" y="4191873"/>
+            <a:ext cx="3008400" cy="1475600"/>
+          </a:xfrm>
+          <a:prstGeom prst="rect">
+            <a:avLst/>
+          </a:prstGeom>
+          <a:noFill/>
+          <a:ln>
+            <a:noFill/>
+          </a:ln>
+        </p:spPr>
+        <p:txBody>
+          <a:bodyPr spcFirstLastPara="1" wrap="square" lIns="121900" tIns="121900" rIns="121900" bIns="121900" anchor="t" anchorCtr="0">
+            <a:noAutofit/>
+          </a:bodyPr>
+          <a:lstStyle/>
+          <a:p>
+            <a:pPr>
+              <a:buSzPts val="1400"/>
+            </a:pPr>
+            <a:r>
+              <a:rPr lang="en" sz="1867">
+                <a:solidFill>
+                  <a:srgbClr val="274E13"/>
+                </a:solidFill>
+              </a:rPr>
+              <a:t>What outcome are you predicting/estimating?</a:t>
+            </a:r>
+            <a:endParaRPr sz="1867">
+              <a:solidFill>
+                <a:srgbClr val="274E13"/>
+              </a:solidFill>
+            </a:endParaRPr>
+          </a:p>
+          <a:p>
+            <a:pPr>
+              <a:buSzPts val="1400"/>
+            </a:pPr>
+            <a:endParaRPr sz="1867">
+              <a:solidFill>
+                <a:srgbClr val="274E13"/>
+              </a:solidFill>
+            </a:endParaRPr>
+          </a:p>
+          <a:p>
+            <a:pPr>
+              <a:buSzPts val="1400"/>
+            </a:pPr>
+            <a:r>
+              <a:rPr lang="en" sz="1867">
+                <a:solidFill>
+                  <a:srgbClr val="B45F06"/>
+                </a:solidFill>
+              </a:rPr>
+              <a:t>For what purpose?</a:t>
+            </a:r>
+            <a:endParaRPr sz="1867">
+              <a:solidFill>
+                <a:srgbClr val="274E13"/>
+              </a:solidFill>
+            </a:endParaRPr>
+          </a:p>
+        </p:txBody>
+      </p:sp>
+    </p:spTree>
+  </p:cSld>
+  <p:clrMapOvr>
+    <a:masterClrMapping/>
+  </p:clrMapOvr>
+</p:sld>
+</file>
+
+<file path=ppt/slides/slide19.xml><?xml version="1.0" encoding="utf-8"?>
+<p:sld xmlns:a="http://schemas.openxmlformats.org/drawingml/2006/main" xmlns:r="http://schemas.openxmlformats.org/officeDocument/2006/relationships" xmlns:p="http://schemas.openxmlformats.org/presentationml/2006/main">
+  <p:cSld>
+    <p:spTree>
+      <p:nvGrpSpPr>
+        <p:cNvPr id="1" name="Shape 232"/>
+        <p:cNvGrpSpPr/>
+        <p:nvPr/>
+      </p:nvGrpSpPr>
+      <p:grpSpPr>
+        <a:xfrm>
+          <a:off x="0" y="0"/>
+          <a:ext cx="0" cy="0"/>
+          <a:chOff x="0" y="0"/>
+          <a:chExt cx="0" cy="0"/>
+        </a:xfrm>
+      </p:grpSpPr>
+      <p:sp>
+        <p:nvSpPr>
+          <p:cNvPr id="2" name="Text Placeholder 1">
+            <a:extLst>
+              <a:ext uri="{FF2B5EF4-FFF2-40B4-BE49-F238E27FC236}">
+                <a16:creationId xmlns:a16="http://schemas.microsoft.com/office/drawing/2014/main" id="{32D41A7C-7A01-06C2-224D-BE64B19B9E95}"/>
+              </a:ext>
+            </a:extLst>
+          </p:cNvPr>
+          <p:cNvSpPr>
+            <a:spLocks noGrp="1"/>
+          </p:cNvSpPr>
+          <p:nvPr>
+            <p:ph type="body" idx="1"/>
+          </p:nvPr>
+        </p:nvSpPr>
+        <p:spPr/>
+        <p:txBody>
+          <a:bodyPr/>
+          <a:lstStyle/>
+          <a:p>
+            <a:endParaRPr lang="en-US"/>
+          </a:p>
+        </p:txBody>
+      </p:sp>
+      <p:sp>
+        <p:nvSpPr>
+          <p:cNvPr id="233" name="Google Shape;233;p42"/>
+          <p:cNvSpPr txBox="1">
+            <a:spLocks noGrp="1"/>
+          </p:cNvSpPr>
+          <p:nvPr>
+            <p:ph type="title"/>
+          </p:nvPr>
+        </p:nvSpPr>
+        <p:spPr>
+          <a:prstGeom prst="rect">
+            <a:avLst/>
+          </a:prstGeom>
+        </p:spPr>
+        <p:txBody>
+          <a:bodyPr spcFirstLastPara="1" wrap="square" lIns="121900" tIns="121900" rIns="121900" bIns="121900" anchor="t" anchorCtr="0">
+            <a:normAutofit fontScale="90000"/>
+          </a:bodyPr>
+          <a:lstStyle/>
+          <a:p>
+            <a:r>
+              <a:rPr lang="en"/>
+              <a:t>Analytical Formulation</a:t>
+            </a:r>
+            <a:endParaRPr/>
+          </a:p>
+        </p:txBody>
+      </p:sp>
+      <p:sp>
+        <p:nvSpPr>
+          <p:cNvPr id="234" name="Google Shape;234;p42"/>
+          <p:cNvSpPr/>
+          <p:nvPr/>
+        </p:nvSpPr>
+        <p:spPr>
+          <a:xfrm>
+            <a:off x="190320" y="1463207"/>
+            <a:ext cx="3124000" cy="4204400"/>
+          </a:xfrm>
+          <a:prstGeom prst="rect">
+            <a:avLst/>
+          </a:prstGeom>
+          <a:solidFill>
+            <a:srgbClr val="EEEEEE"/>
+          </a:solidFill>
+          <a:ln w="9525" cap="flat" cmpd="sng">
+            <a:solidFill>
+              <a:srgbClr val="595959"/>
+            </a:solidFill>
+            <a:prstDash val="solid"/>
+            <a:round/>
+            <a:headEnd type="none" w="sm" len="sm"/>
+            <a:tailEnd type="none" w="sm" len="sm"/>
+          </a:ln>
+        </p:spPr>
+        <p:txBody>
+          <a:bodyPr spcFirstLastPara="1" wrap="square" lIns="121900" tIns="121900" rIns="121900" bIns="121900" anchor="ctr" anchorCtr="0">
+            <a:noAutofit/>
+          </a:bodyPr>
+          <a:lstStyle/>
+          <a:p>
+            <a:pPr>
+              <a:buSzPts val="1400"/>
+            </a:pPr>
+            <a:endParaRPr sz="1867"/>
+          </a:p>
+        </p:txBody>
+      </p:sp>
+      <p:sp>
+        <p:nvSpPr>
+          <p:cNvPr id="235" name="Google Shape;235;p42"/>
+          <p:cNvSpPr txBox="1"/>
+          <p:nvPr/>
+        </p:nvSpPr>
+        <p:spPr>
+          <a:xfrm>
+            <a:off x="3566453" y="1341573"/>
+            <a:ext cx="8531200" cy="4555200"/>
+          </a:xfrm>
+          <a:prstGeom prst="rect">
+            <a:avLst/>
+          </a:prstGeom>
+          <a:noFill/>
+          <a:ln>
+            <a:noFill/>
+          </a:ln>
+        </p:spPr>
+        <p:txBody>
+          <a:bodyPr spcFirstLastPara="1" wrap="square" lIns="121900" tIns="121900" rIns="121900" bIns="121900" anchor="t" anchorCtr="0">
+            <a:noAutofit/>
+          </a:bodyPr>
+          <a:lstStyle/>
+          <a:p>
+            <a:pPr>
+              <a:buClr>
+                <a:schemeClr val="dk1"/>
+              </a:buClr>
+              <a:buSzPts val="1100"/>
+            </a:pPr>
+            <a:r>
+              <a:rPr lang="en" sz="3467" dirty="0">
+                <a:solidFill>
+                  <a:srgbClr val="FF0000"/>
+                </a:solidFill>
+              </a:rPr>
+              <a:t>Every day</a:t>
+            </a:r>
+            <a:r>
+              <a:rPr lang="en" sz="3467" dirty="0">
+                <a:solidFill>
+                  <a:schemeClr val="dk1"/>
+                </a:solidFill>
+              </a:rPr>
+              <a:t>, for</a:t>
+            </a:r>
+            <a:r>
+              <a:rPr lang="en" sz="3467" dirty="0">
+                <a:solidFill>
+                  <a:srgbClr val="0000FF"/>
+                </a:solidFill>
+              </a:rPr>
+              <a:t> all first time defendants with </a:t>
+            </a:r>
+            <a:r>
+              <a:rPr lang="en" sz="3467" dirty="0">
+                <a:solidFill>
+                  <a:srgbClr val="0000FF"/>
+                </a:solidFill>
+                <a:highlight>
+                  <a:srgbClr val="FFFFFF"/>
+                </a:highlight>
+              </a:rPr>
+              <a:t>low-level, nonviolent ordinance violation cases</a:t>
+            </a:r>
+            <a:r>
+              <a:rPr lang="en" sz="3467" dirty="0">
+                <a:solidFill>
+                  <a:schemeClr val="dk1"/>
+                </a:solidFill>
+              </a:rPr>
+              <a:t>, can we identify the </a:t>
+            </a:r>
+            <a:r>
+              <a:rPr lang="en" sz="3467" dirty="0">
+                <a:solidFill>
+                  <a:srgbClr val="FF00FF"/>
+                </a:solidFill>
+              </a:rPr>
+              <a:t>top 5% of people at highest risk </a:t>
+            </a:r>
+            <a:r>
+              <a:rPr lang="en" sz="3467" dirty="0">
+                <a:solidFill>
+                  <a:schemeClr val="dk1"/>
+                </a:solidFill>
+              </a:rPr>
+              <a:t>of</a:t>
+            </a:r>
+            <a:r>
+              <a:rPr lang="en" sz="3467" dirty="0">
+                <a:solidFill>
+                  <a:srgbClr val="38761D"/>
+                </a:solidFill>
+              </a:rPr>
+              <a:t> not completing their probation terms</a:t>
+            </a:r>
+            <a:r>
+              <a:rPr lang="en" sz="3467" dirty="0">
+                <a:solidFill>
+                  <a:srgbClr val="FF00FF"/>
+                </a:solidFill>
+              </a:rPr>
+              <a:t> </a:t>
+            </a:r>
+            <a:r>
+              <a:rPr lang="en" sz="3467" dirty="0">
+                <a:solidFill>
+                  <a:srgbClr val="B45F06"/>
+                </a:solidFill>
+              </a:rPr>
+              <a:t>to restructure their terms in order to support better outcomes and prevent new cases.</a:t>
+            </a:r>
+            <a:endParaRPr sz="3467" dirty="0">
+              <a:solidFill>
+                <a:srgbClr val="B45F06"/>
+              </a:solidFill>
+            </a:endParaRPr>
+          </a:p>
+          <a:p>
+            <a:pPr>
+              <a:lnSpc>
+                <a:spcPct val="115000"/>
+              </a:lnSpc>
+              <a:spcAft>
+                <a:spcPts val="2133"/>
+              </a:spcAft>
+            </a:pPr>
+            <a:endParaRPr sz="3467" dirty="0">
+              <a:solidFill>
+                <a:srgbClr val="595959"/>
+              </a:solidFill>
+            </a:endParaRPr>
+          </a:p>
+        </p:txBody>
+      </p:sp>
+      <p:sp>
+        <p:nvSpPr>
+          <p:cNvPr id="236" name="Google Shape;236;p42"/>
+          <p:cNvSpPr txBox="1"/>
+          <p:nvPr/>
+        </p:nvSpPr>
+        <p:spPr>
+          <a:xfrm>
+            <a:off x="248120" y="1463207"/>
+            <a:ext cx="3008400" cy="796000"/>
+          </a:xfrm>
+          <a:prstGeom prst="rect">
+            <a:avLst/>
+          </a:prstGeom>
+          <a:noFill/>
+          <a:ln>
+            <a:noFill/>
+          </a:ln>
+        </p:spPr>
+        <p:txBody>
+          <a:bodyPr spcFirstLastPara="1" wrap="square" lIns="121900" tIns="121900" rIns="121900" bIns="121900" anchor="t" anchorCtr="0">
+            <a:noAutofit/>
+          </a:bodyPr>
+          <a:lstStyle/>
+          <a:p>
+            <a:pPr>
+              <a:buSzPts val="1400"/>
+            </a:pPr>
+            <a:r>
+              <a:rPr lang="en" sz="1867">
+                <a:solidFill>
+                  <a:srgbClr val="FF0000"/>
+                </a:solidFill>
+              </a:rPr>
+              <a:t>When and How often is the recommendation / decision being made?</a:t>
+            </a:r>
+            <a:endParaRPr sz="1867">
+              <a:solidFill>
+                <a:srgbClr val="FF0000"/>
+              </a:solidFill>
+            </a:endParaRPr>
+          </a:p>
+        </p:txBody>
+      </p:sp>
+      <p:sp>
+        <p:nvSpPr>
+          <p:cNvPr id="237" name="Google Shape;237;p42"/>
+          <p:cNvSpPr txBox="1"/>
+          <p:nvPr/>
+        </p:nvSpPr>
+        <p:spPr>
+          <a:xfrm>
+            <a:off x="253253" y="2632740"/>
+            <a:ext cx="3008400" cy="796000"/>
+          </a:xfrm>
+          <a:prstGeom prst="rect">
+            <a:avLst/>
+          </a:prstGeom>
+          <a:noFill/>
+          <a:ln>
+            <a:noFill/>
+          </a:ln>
+        </p:spPr>
+        <p:txBody>
+          <a:bodyPr spcFirstLastPara="1" wrap="square" lIns="121900" tIns="121900" rIns="121900" bIns="121900" anchor="t" anchorCtr="0">
+            <a:noAutofit/>
+          </a:bodyPr>
+          <a:lstStyle/>
+          <a:p>
+            <a:pPr>
+              <a:buSzPts val="1400"/>
+            </a:pPr>
+            <a:br>
+              <a:rPr lang="en" sz="1867">
+                <a:solidFill>
+                  <a:srgbClr val="0000FF"/>
+                </a:solidFill>
+              </a:rPr>
+            </a:br>
+            <a:r>
+              <a:rPr lang="en" sz="1867">
+                <a:solidFill>
+                  <a:srgbClr val="0000FF"/>
+                </a:solidFill>
+              </a:rPr>
+              <a:t>Who/what is included in the cohort?</a:t>
+            </a:r>
+            <a:endParaRPr sz="1867">
+              <a:solidFill>
+                <a:srgbClr val="0000FF"/>
+              </a:solidFill>
+            </a:endParaRPr>
+          </a:p>
+        </p:txBody>
+      </p:sp>
+      <p:sp>
+        <p:nvSpPr>
+          <p:cNvPr id="238" name="Google Shape;238;p42"/>
+          <p:cNvSpPr txBox="1"/>
+          <p:nvPr/>
+        </p:nvSpPr>
+        <p:spPr>
+          <a:xfrm>
+            <a:off x="253253" y="3497473"/>
+            <a:ext cx="3008400" cy="796000"/>
+          </a:xfrm>
+          <a:prstGeom prst="rect">
+            <a:avLst/>
+          </a:prstGeom>
+          <a:noFill/>
+          <a:ln>
+            <a:noFill/>
+          </a:ln>
+        </p:spPr>
+        <p:txBody>
+          <a:bodyPr spcFirstLastPara="1" wrap="square" lIns="121900" tIns="121900" rIns="121900" bIns="121900" anchor="t" anchorCtr="0">
+            <a:noAutofit/>
+          </a:bodyPr>
+          <a:lstStyle/>
+          <a:p>
+            <a:pPr>
+              <a:buSzPts val="1400"/>
+            </a:pPr>
+            <a:br>
+              <a:rPr lang="en" sz="1867">
+                <a:solidFill>
+                  <a:srgbClr val="FF00FF"/>
+                </a:solidFill>
+              </a:rPr>
+            </a:br>
+            <a:r>
+              <a:rPr lang="en" sz="1867">
+                <a:solidFill>
+                  <a:srgbClr val="FF00FF"/>
+                </a:solidFill>
+              </a:rPr>
+              <a:t>What is the output?</a:t>
+            </a:r>
+            <a:endParaRPr sz="1867">
+              <a:solidFill>
+                <a:srgbClr val="FF00FF"/>
+              </a:solidFill>
+            </a:endParaRPr>
+          </a:p>
+        </p:txBody>
+      </p:sp>
+      <p:sp>
+        <p:nvSpPr>
+          <p:cNvPr id="239" name="Google Shape;239;p42"/>
           <p:cNvSpPr txBox="1"/>
           <p:nvPr/>
         </p:nvSpPr>
@@ -8224,7 +8314,7 @@
   <p:cSld>
     <p:spTree>
       <p:nvGrpSpPr>
-        <p:cNvPr id="1" name="Shape 232"/>
+        <p:cNvPr id="1" name="Shape 262"/>
         <p:cNvGrpSpPr/>
         <p:nvPr/>
       </p:nvGrpSpPr>
@@ -8241,7 +8331,7 @@
           <p:cNvPr id="2" name="Text Placeholder 1">
             <a:extLst>
               <a:ext uri="{FF2B5EF4-FFF2-40B4-BE49-F238E27FC236}">
-                <a16:creationId xmlns:a16="http://schemas.microsoft.com/office/drawing/2014/main" id="{32D41A7C-7A01-06C2-224D-BE64B19B9E95}"/>
+                <a16:creationId xmlns:a16="http://schemas.microsoft.com/office/drawing/2014/main" id="{BB1BBD25-1C37-5157-CF0F-11E6D2EA892C}"/>
               </a:ext>
             </a:extLst>
           </p:cNvPr>
@@ -8263,7 +8353,7 @@
       </p:sp>
       <p:sp>
         <p:nvSpPr>
-          <p:cNvPr id="233" name="Google Shape;233;p42"/>
+          <p:cNvPr id="263" name="Google Shape;263;p46"/>
           <p:cNvSpPr txBox="1">
             <a:spLocks noGrp="1"/>
           </p:cNvSpPr>
@@ -8292,7 +8382,127 @@
       </p:sp>
       <p:sp>
         <p:nvSpPr>
-          <p:cNvPr id="234" name="Google Shape;234;p42"/>
+          <p:cNvPr id="265" name="Google Shape;265;p46"/>
+          <p:cNvSpPr txBox="1"/>
+          <p:nvPr/>
+        </p:nvSpPr>
+        <p:spPr>
+          <a:xfrm>
+            <a:off x="3629033" y="1463200"/>
+            <a:ext cx="8147200" cy="4588395"/>
+          </a:xfrm>
+          <a:prstGeom prst="rect">
+            <a:avLst/>
+          </a:prstGeom>
+          <a:noFill/>
+          <a:ln>
+            <a:noFill/>
+          </a:ln>
+        </p:spPr>
+        <p:txBody>
+          <a:bodyPr spcFirstLastPara="1" wrap="square" lIns="121900" tIns="121900" rIns="121900" bIns="121900" anchor="t" anchorCtr="0">
+            <a:spAutoFit/>
+          </a:bodyPr>
+          <a:lstStyle/>
+          <a:p>
+            <a:pPr>
+              <a:lnSpc>
+                <a:spcPct val="115000"/>
+              </a:lnSpc>
+            </a:pPr>
+            <a:r>
+              <a:rPr lang="en" sz="3067" dirty="0">
+                <a:solidFill>
+                  <a:srgbClr val="FF0000"/>
+                </a:solidFill>
+                <a:latin typeface="Calibri"/>
+                <a:ea typeface="Calibri"/>
+                <a:cs typeface="Calibri"/>
+                <a:sym typeface="Calibri"/>
+              </a:rPr>
+              <a:t>Every time ACDHS gets eviction filing data (weekly),</a:t>
+            </a:r>
+            <a:r>
+              <a:rPr lang="en" sz="3067" dirty="0">
+                <a:solidFill>
+                  <a:srgbClr val="0000FF"/>
+                </a:solidFill>
+                <a:latin typeface="Calibri"/>
+                <a:ea typeface="Calibri"/>
+                <a:cs typeface="Calibri"/>
+                <a:sym typeface="Calibri"/>
+              </a:rPr>
+              <a:t> for all individuals who have interacted with ACDHS in the 12 months who are not currently homeless and have had an eviction filing in the last 4 months</a:t>
+            </a:r>
+            <a:r>
+              <a:rPr lang="en" sz="3067" dirty="0">
+                <a:latin typeface="Calibri"/>
+                <a:ea typeface="Calibri"/>
+                <a:cs typeface="Calibri"/>
+                <a:sym typeface="Calibri"/>
+              </a:rPr>
+              <a:t>, can we identify the </a:t>
+            </a:r>
+            <a:r>
+              <a:rPr lang="en" sz="3067" dirty="0">
+                <a:solidFill>
+                  <a:srgbClr val="FF00FF"/>
+                </a:solidFill>
+                <a:latin typeface="Calibri"/>
+                <a:ea typeface="Calibri"/>
+                <a:cs typeface="Calibri"/>
+                <a:sym typeface="Calibri"/>
+              </a:rPr>
+              <a:t>50 individuals at highest risk</a:t>
+            </a:r>
+            <a:r>
+              <a:rPr lang="en" sz="3067" dirty="0">
+                <a:latin typeface="Calibri"/>
+                <a:ea typeface="Calibri"/>
+                <a:cs typeface="Calibri"/>
+                <a:sym typeface="Calibri"/>
+              </a:rPr>
+              <a:t> </a:t>
+            </a:r>
+            <a:r>
+              <a:rPr lang="en" sz="3067" dirty="0">
+                <a:solidFill>
+                  <a:srgbClr val="38761D"/>
+                </a:solidFill>
+                <a:latin typeface="Calibri"/>
+                <a:ea typeface="Calibri"/>
+                <a:cs typeface="Calibri"/>
+                <a:sym typeface="Calibri"/>
+              </a:rPr>
+              <a:t>of entering into homelessness in the next 12 months </a:t>
+            </a:r>
+            <a:r>
+              <a:rPr lang="en" sz="3067" dirty="0">
+                <a:solidFill>
+                  <a:srgbClr val="B45F06"/>
+                </a:solidFill>
+                <a:latin typeface="Calibri"/>
+                <a:ea typeface="Calibri"/>
+                <a:cs typeface="Calibri"/>
+                <a:sym typeface="Calibri"/>
+              </a:rPr>
+              <a:t>to prioritize for distribution of rental assistance?</a:t>
+            </a:r>
+            <a:endParaRPr sz="3467" dirty="0">
+              <a:solidFill>
+                <a:srgbClr val="B45F06"/>
+              </a:solidFill>
+              <a:latin typeface="Calibri"/>
+              <a:ea typeface="Calibri"/>
+              <a:cs typeface="Calibri"/>
+              <a:sym typeface="Calibri"/>
+            </a:endParaRPr>
+          </a:p>
+        </p:txBody>
+      </p:sp>
+      <p:sp>
+        <p:nvSpPr>
+          <p:cNvPr id="266" name="Google Shape;266;p46"/>
           <p:cNvSpPr/>
           <p:nvPr/>
         </p:nvSpPr>
@@ -8332,144 +8542,7 @@
       </p:sp>
       <p:sp>
         <p:nvSpPr>
-          <p:cNvPr id="235" name="Google Shape;235;p42"/>
-          <p:cNvSpPr txBox="1"/>
-          <p:nvPr/>
-        </p:nvSpPr>
-        <p:spPr>
-          <a:xfrm>
-            <a:off x="3566453" y="1341573"/>
-            <a:ext cx="8531200" cy="4555200"/>
-          </a:xfrm>
-          <a:prstGeom prst="rect">
-            <a:avLst/>
-          </a:prstGeom>
-          <a:noFill/>
-          <a:ln>
-            <a:noFill/>
-          </a:ln>
-        </p:spPr>
-        <p:txBody>
-          <a:bodyPr spcFirstLastPara="1" wrap="square" lIns="121900" tIns="121900" rIns="121900" bIns="121900" anchor="t" anchorCtr="0">
-            <a:noAutofit/>
-          </a:bodyPr>
-          <a:lstStyle/>
-          <a:p>
-            <a:pPr>
-              <a:buClr>
-                <a:schemeClr val="dk1"/>
-              </a:buClr>
-              <a:buSzPts val="1100"/>
-            </a:pPr>
-            <a:r>
-              <a:rPr lang="en" sz="3467" dirty="0">
-                <a:solidFill>
-                  <a:srgbClr val="FF0000"/>
-                </a:solidFill>
-              </a:rPr>
-              <a:t>Every day</a:t>
-            </a:r>
-            <a:r>
-              <a:rPr lang="en" sz="3467" dirty="0">
-                <a:solidFill>
-                  <a:schemeClr val="dk1"/>
-                </a:solidFill>
-              </a:rPr>
-              <a:t>, for</a:t>
-            </a:r>
-            <a:r>
-              <a:rPr lang="en" sz="3467" dirty="0">
-                <a:solidFill>
-                  <a:srgbClr val="0000FF"/>
-                </a:solidFill>
-              </a:rPr>
-              <a:t> all first time defendants with </a:t>
-            </a:r>
-            <a:r>
-              <a:rPr lang="en" sz="3467" dirty="0">
-                <a:solidFill>
-                  <a:srgbClr val="0000FF"/>
-                </a:solidFill>
-                <a:highlight>
-                  <a:srgbClr val="FFFFFF"/>
-                </a:highlight>
-              </a:rPr>
-              <a:t>low-level, nonviolent ordinance violation cases</a:t>
-            </a:r>
-            <a:r>
-              <a:rPr lang="en" sz="3467" dirty="0">
-                <a:solidFill>
-                  <a:schemeClr val="dk1"/>
-                </a:solidFill>
-              </a:rPr>
-              <a:t>, can we identify the </a:t>
-            </a:r>
-            <a:r>
-              <a:rPr lang="en" sz="3467" dirty="0">
-                <a:solidFill>
-                  <a:srgbClr val="FF00FF"/>
-                </a:solidFill>
-              </a:rPr>
-              <a:t>top 5% of people at highest risk </a:t>
-            </a:r>
-            <a:r>
-              <a:rPr lang="en" sz="3467" dirty="0">
-                <a:solidFill>
-                  <a:schemeClr val="dk1"/>
-                </a:solidFill>
-              </a:rPr>
-              <a:t>of</a:t>
-            </a:r>
-            <a:r>
-              <a:rPr lang="en" sz="3467" dirty="0">
-                <a:solidFill>
-                  <a:srgbClr val="38761D"/>
-                </a:solidFill>
-              </a:rPr>
-              <a:t> not completing their probation terms</a:t>
-            </a:r>
-            <a:r>
-              <a:rPr lang="en" sz="3467" dirty="0">
-                <a:solidFill>
-                  <a:srgbClr val="FF00FF"/>
-                </a:solidFill>
-              </a:rPr>
-              <a:t> </a:t>
-            </a:r>
-            <a:r>
-              <a:rPr lang="en" sz="3467" dirty="0">
-                <a:solidFill>
-                  <a:srgbClr val="B45F06"/>
-                </a:solidFill>
-              </a:rPr>
-              <a:t>to restructure their terms in order to support better outcomes and prevent new cases.</a:t>
-            </a:r>
-            <a:endParaRPr sz="3467" dirty="0">
-              <a:solidFill>
-                <a:srgbClr val="B45F06"/>
-              </a:solidFill>
-            </a:endParaRPr>
-          </a:p>
-          <a:p>
-            <a:pPr>
-              <a:lnSpc>
-                <a:spcPct val="115000"/>
-              </a:lnSpc>
-              <a:spcAft>
-                <a:spcPts val="2133"/>
-              </a:spcAft>
-            </a:pPr>
-            <a:endParaRPr sz="3467" dirty="0">
-              <a:solidFill>
-                <a:srgbClr val="595959"/>
-              </a:solidFill>
-            </a:endParaRPr>
-          </a:p>
-        </p:txBody>
-      </p:sp>
-      <p:sp>
-        <p:nvSpPr>
-          <p:cNvPr id="236" name="Google Shape;236;p42"/>
+          <p:cNvPr id="267" name="Google Shape;267;p46"/>
           <p:cNvSpPr txBox="1"/>
           <p:nvPr/>
         </p:nvSpPr>
@@ -8513,7 +8586,7 @@
       </p:sp>
       <p:sp>
         <p:nvSpPr>
-          <p:cNvPr id="237" name="Google Shape;237;p42"/>
+          <p:cNvPr id="268" name="Google Shape;268;p46"/>
           <p:cNvSpPr txBox="1"/>
           <p:nvPr/>
         </p:nvSpPr>
@@ -8564,7 +8637,7 @@
       </p:sp>
       <p:sp>
         <p:nvSpPr>
-          <p:cNvPr id="238" name="Google Shape;238;p42"/>
+          <p:cNvPr id="269" name="Google Shape;269;p46"/>
           <p:cNvSpPr txBox="1"/>
           <p:nvPr/>
         </p:nvSpPr>
@@ -8615,7 +8688,7 @@
       </p:sp>
       <p:sp>
         <p:nvSpPr>
-          <p:cNvPr id="239" name="Google Shape;239;p42"/>
+          <p:cNvPr id="270" name="Google Shape;270;p46"/>
           <p:cNvSpPr txBox="1"/>
           <p:nvPr/>
         </p:nvSpPr>
@@ -8694,463 +8767,6 @@
 </file>
 
 <file path=ppt/slides/slide21.xml><?xml version="1.0" encoding="utf-8"?>
-<p:sld xmlns:a="http://schemas.openxmlformats.org/drawingml/2006/main" xmlns:r="http://schemas.openxmlformats.org/officeDocument/2006/relationships" xmlns:p="http://schemas.openxmlformats.org/presentationml/2006/main">
-  <p:cSld>
-    <p:spTree>
-      <p:nvGrpSpPr>
-        <p:cNvPr id="1" name="Shape 262"/>
-        <p:cNvGrpSpPr/>
-        <p:nvPr/>
-      </p:nvGrpSpPr>
-      <p:grpSpPr>
-        <a:xfrm>
-          <a:off x="0" y="0"/>
-          <a:ext cx="0" cy="0"/>
-          <a:chOff x="0" y="0"/>
-          <a:chExt cx="0" cy="0"/>
-        </a:xfrm>
-      </p:grpSpPr>
-      <p:sp>
-        <p:nvSpPr>
-          <p:cNvPr id="2" name="Text Placeholder 1">
-            <a:extLst>
-              <a:ext uri="{FF2B5EF4-FFF2-40B4-BE49-F238E27FC236}">
-                <a16:creationId xmlns:a16="http://schemas.microsoft.com/office/drawing/2014/main" id="{BB1BBD25-1C37-5157-CF0F-11E6D2EA892C}"/>
-              </a:ext>
-            </a:extLst>
-          </p:cNvPr>
-          <p:cNvSpPr>
-            <a:spLocks noGrp="1"/>
-          </p:cNvSpPr>
-          <p:nvPr>
-            <p:ph type="body" idx="1"/>
-          </p:nvPr>
-        </p:nvSpPr>
-        <p:spPr/>
-        <p:txBody>
-          <a:bodyPr/>
-          <a:lstStyle/>
-          <a:p>
-            <a:endParaRPr lang="en-US"/>
-          </a:p>
-        </p:txBody>
-      </p:sp>
-      <p:sp>
-        <p:nvSpPr>
-          <p:cNvPr id="263" name="Google Shape;263;p46"/>
-          <p:cNvSpPr txBox="1">
-            <a:spLocks noGrp="1"/>
-          </p:cNvSpPr>
-          <p:nvPr>
-            <p:ph type="title"/>
-          </p:nvPr>
-        </p:nvSpPr>
-        <p:spPr>
-          <a:prstGeom prst="rect">
-            <a:avLst/>
-          </a:prstGeom>
-        </p:spPr>
-        <p:txBody>
-          <a:bodyPr spcFirstLastPara="1" wrap="square" lIns="121900" tIns="121900" rIns="121900" bIns="121900" anchor="t" anchorCtr="0">
-            <a:normAutofit fontScale="90000"/>
-          </a:bodyPr>
-          <a:lstStyle/>
-          <a:p>
-            <a:r>
-              <a:rPr lang="en"/>
-              <a:t>Analytical Formulation</a:t>
-            </a:r>
-            <a:endParaRPr/>
-          </a:p>
-        </p:txBody>
-      </p:sp>
-      <p:sp>
-        <p:nvSpPr>
-          <p:cNvPr id="265" name="Google Shape;265;p46"/>
-          <p:cNvSpPr txBox="1"/>
-          <p:nvPr/>
-        </p:nvSpPr>
-        <p:spPr>
-          <a:xfrm>
-            <a:off x="3629033" y="1463200"/>
-            <a:ext cx="8147200" cy="4588395"/>
-          </a:xfrm>
-          <a:prstGeom prst="rect">
-            <a:avLst/>
-          </a:prstGeom>
-          <a:noFill/>
-          <a:ln>
-            <a:noFill/>
-          </a:ln>
-        </p:spPr>
-        <p:txBody>
-          <a:bodyPr spcFirstLastPara="1" wrap="square" lIns="121900" tIns="121900" rIns="121900" bIns="121900" anchor="t" anchorCtr="0">
-            <a:spAutoFit/>
-          </a:bodyPr>
-          <a:lstStyle/>
-          <a:p>
-            <a:pPr>
-              <a:lnSpc>
-                <a:spcPct val="115000"/>
-              </a:lnSpc>
-            </a:pPr>
-            <a:r>
-              <a:rPr lang="en" sz="3067" dirty="0">
-                <a:solidFill>
-                  <a:srgbClr val="FF0000"/>
-                </a:solidFill>
-                <a:latin typeface="Calibri"/>
-                <a:ea typeface="Calibri"/>
-                <a:cs typeface="Calibri"/>
-                <a:sym typeface="Calibri"/>
-              </a:rPr>
-              <a:t>Every time ACDHS gets eviction filing data (weekly),</a:t>
-            </a:r>
-            <a:r>
-              <a:rPr lang="en" sz="3067" dirty="0">
-                <a:solidFill>
-                  <a:srgbClr val="0000FF"/>
-                </a:solidFill>
-                <a:latin typeface="Calibri"/>
-                <a:ea typeface="Calibri"/>
-                <a:cs typeface="Calibri"/>
-                <a:sym typeface="Calibri"/>
-              </a:rPr>
-              <a:t> for all individuals who have interacted with ACDHS in the 12 months who are not currently homeless and have had an eviction filing in the last 4 months</a:t>
-            </a:r>
-            <a:r>
-              <a:rPr lang="en" sz="3067" dirty="0">
-                <a:latin typeface="Calibri"/>
-                <a:ea typeface="Calibri"/>
-                <a:cs typeface="Calibri"/>
-                <a:sym typeface="Calibri"/>
-              </a:rPr>
-              <a:t>, can we identify the </a:t>
-            </a:r>
-            <a:r>
-              <a:rPr lang="en" sz="3067" dirty="0">
-                <a:solidFill>
-                  <a:srgbClr val="FF00FF"/>
-                </a:solidFill>
-                <a:latin typeface="Calibri"/>
-                <a:ea typeface="Calibri"/>
-                <a:cs typeface="Calibri"/>
-                <a:sym typeface="Calibri"/>
-              </a:rPr>
-              <a:t>50 individuals at highest risk</a:t>
-            </a:r>
-            <a:r>
-              <a:rPr lang="en" sz="3067" dirty="0">
-                <a:latin typeface="Calibri"/>
-                <a:ea typeface="Calibri"/>
-                <a:cs typeface="Calibri"/>
-                <a:sym typeface="Calibri"/>
-              </a:rPr>
-              <a:t> </a:t>
-            </a:r>
-            <a:r>
-              <a:rPr lang="en" sz="3067" dirty="0">
-                <a:solidFill>
-                  <a:srgbClr val="38761D"/>
-                </a:solidFill>
-                <a:latin typeface="Calibri"/>
-                <a:ea typeface="Calibri"/>
-                <a:cs typeface="Calibri"/>
-                <a:sym typeface="Calibri"/>
-              </a:rPr>
-              <a:t>of entering into homelessness in the next 12 months </a:t>
-            </a:r>
-            <a:r>
-              <a:rPr lang="en" sz="3067" dirty="0">
-                <a:solidFill>
-                  <a:srgbClr val="B45F06"/>
-                </a:solidFill>
-                <a:latin typeface="Calibri"/>
-                <a:ea typeface="Calibri"/>
-                <a:cs typeface="Calibri"/>
-                <a:sym typeface="Calibri"/>
-              </a:rPr>
-              <a:t>to prioritize for distribution of rental assistance?</a:t>
-            </a:r>
-            <a:endParaRPr sz="3467" dirty="0">
-              <a:solidFill>
-                <a:srgbClr val="B45F06"/>
-              </a:solidFill>
-              <a:latin typeface="Calibri"/>
-              <a:ea typeface="Calibri"/>
-              <a:cs typeface="Calibri"/>
-              <a:sym typeface="Calibri"/>
-            </a:endParaRPr>
-          </a:p>
-        </p:txBody>
-      </p:sp>
-      <p:sp>
-        <p:nvSpPr>
-          <p:cNvPr id="266" name="Google Shape;266;p46"/>
-          <p:cNvSpPr/>
-          <p:nvPr/>
-        </p:nvSpPr>
-        <p:spPr>
-          <a:xfrm>
-            <a:off x="190320" y="1463207"/>
-            <a:ext cx="3124000" cy="4204400"/>
-          </a:xfrm>
-          <a:prstGeom prst="rect">
-            <a:avLst/>
-          </a:prstGeom>
-          <a:solidFill>
-            <a:srgbClr val="EEEEEE"/>
-          </a:solidFill>
-          <a:ln w="9525" cap="flat" cmpd="sng">
-            <a:solidFill>
-              <a:srgbClr val="595959"/>
-            </a:solidFill>
-            <a:prstDash val="solid"/>
-            <a:round/>
-            <a:headEnd type="none" w="sm" len="sm"/>
-            <a:tailEnd type="none" w="sm" len="sm"/>
-          </a:ln>
-        </p:spPr>
-        <p:txBody>
-          <a:bodyPr spcFirstLastPara="1" wrap="square" lIns="121900" tIns="121900" rIns="121900" bIns="121900" anchor="ctr" anchorCtr="0">
-            <a:noAutofit/>
-          </a:bodyPr>
-          <a:lstStyle/>
-          <a:p>
-            <a:pPr>
-              <a:buSzPts val="1400"/>
-            </a:pPr>
-            <a:endParaRPr sz="1867"/>
-          </a:p>
-        </p:txBody>
-      </p:sp>
-      <p:sp>
-        <p:nvSpPr>
-          <p:cNvPr id="267" name="Google Shape;267;p46"/>
-          <p:cNvSpPr txBox="1"/>
-          <p:nvPr/>
-        </p:nvSpPr>
-        <p:spPr>
-          <a:xfrm>
-            <a:off x="248120" y="1463207"/>
-            <a:ext cx="3008400" cy="796000"/>
-          </a:xfrm>
-          <a:prstGeom prst="rect">
-            <a:avLst/>
-          </a:prstGeom>
-          <a:noFill/>
-          <a:ln>
-            <a:noFill/>
-          </a:ln>
-        </p:spPr>
-        <p:txBody>
-          <a:bodyPr spcFirstLastPara="1" wrap="square" lIns="121900" tIns="121900" rIns="121900" bIns="121900" anchor="t" anchorCtr="0">
-            <a:noAutofit/>
-          </a:bodyPr>
-          <a:lstStyle/>
-          <a:p>
-            <a:pPr>
-              <a:buSzPts val="1400"/>
-            </a:pPr>
-            <a:r>
-              <a:rPr lang="en" sz="1867">
-                <a:solidFill>
-                  <a:srgbClr val="FF0000"/>
-                </a:solidFill>
-              </a:rPr>
-              <a:t>When and How often is the recommendation / decision being made?</a:t>
-            </a:r>
-            <a:endParaRPr sz="1867">
-              <a:solidFill>
-                <a:srgbClr val="FF0000"/>
-              </a:solidFill>
-            </a:endParaRPr>
-          </a:p>
-        </p:txBody>
-      </p:sp>
-      <p:sp>
-        <p:nvSpPr>
-          <p:cNvPr id="268" name="Google Shape;268;p46"/>
-          <p:cNvSpPr txBox="1"/>
-          <p:nvPr/>
-        </p:nvSpPr>
-        <p:spPr>
-          <a:xfrm>
-            <a:off x="253253" y="2632740"/>
-            <a:ext cx="3008400" cy="796000"/>
-          </a:xfrm>
-          <a:prstGeom prst="rect">
-            <a:avLst/>
-          </a:prstGeom>
-          <a:noFill/>
-          <a:ln>
-            <a:noFill/>
-          </a:ln>
-        </p:spPr>
-        <p:txBody>
-          <a:bodyPr spcFirstLastPara="1" wrap="square" lIns="121900" tIns="121900" rIns="121900" bIns="121900" anchor="t" anchorCtr="0">
-            <a:noAutofit/>
-          </a:bodyPr>
-          <a:lstStyle/>
-          <a:p>
-            <a:pPr>
-              <a:buSzPts val="1400"/>
-            </a:pPr>
-            <a:br>
-              <a:rPr lang="en" sz="1867">
-                <a:solidFill>
-                  <a:srgbClr val="0000FF"/>
-                </a:solidFill>
-              </a:rPr>
-            </a:br>
-            <a:r>
-              <a:rPr lang="en" sz="1867">
-                <a:solidFill>
-                  <a:srgbClr val="0000FF"/>
-                </a:solidFill>
-              </a:rPr>
-              <a:t>Who/what is included in the cohort?</a:t>
-            </a:r>
-            <a:endParaRPr sz="1867">
-              <a:solidFill>
-                <a:srgbClr val="0000FF"/>
-              </a:solidFill>
-            </a:endParaRPr>
-          </a:p>
-        </p:txBody>
-      </p:sp>
-      <p:sp>
-        <p:nvSpPr>
-          <p:cNvPr id="269" name="Google Shape;269;p46"/>
-          <p:cNvSpPr txBox="1"/>
-          <p:nvPr/>
-        </p:nvSpPr>
-        <p:spPr>
-          <a:xfrm>
-            <a:off x="253253" y="3497473"/>
-            <a:ext cx="3008400" cy="796000"/>
-          </a:xfrm>
-          <a:prstGeom prst="rect">
-            <a:avLst/>
-          </a:prstGeom>
-          <a:noFill/>
-          <a:ln>
-            <a:noFill/>
-          </a:ln>
-        </p:spPr>
-        <p:txBody>
-          <a:bodyPr spcFirstLastPara="1" wrap="square" lIns="121900" tIns="121900" rIns="121900" bIns="121900" anchor="t" anchorCtr="0">
-            <a:noAutofit/>
-          </a:bodyPr>
-          <a:lstStyle/>
-          <a:p>
-            <a:pPr>
-              <a:buSzPts val="1400"/>
-            </a:pPr>
-            <a:br>
-              <a:rPr lang="en" sz="1867">
-                <a:solidFill>
-                  <a:srgbClr val="FF00FF"/>
-                </a:solidFill>
-              </a:rPr>
-            </a:br>
-            <a:r>
-              <a:rPr lang="en" sz="1867">
-                <a:solidFill>
-                  <a:srgbClr val="FF00FF"/>
-                </a:solidFill>
-              </a:rPr>
-              <a:t>What is the output?</a:t>
-            </a:r>
-            <a:endParaRPr sz="1867">
-              <a:solidFill>
-                <a:srgbClr val="FF00FF"/>
-              </a:solidFill>
-            </a:endParaRPr>
-          </a:p>
-        </p:txBody>
-      </p:sp>
-      <p:sp>
-        <p:nvSpPr>
-          <p:cNvPr id="270" name="Google Shape;270;p46"/>
-          <p:cNvSpPr txBox="1"/>
-          <p:nvPr/>
-        </p:nvSpPr>
-        <p:spPr>
-          <a:xfrm>
-            <a:off x="248120" y="4191873"/>
-            <a:ext cx="3008400" cy="1475600"/>
-          </a:xfrm>
-          <a:prstGeom prst="rect">
-            <a:avLst/>
-          </a:prstGeom>
-          <a:noFill/>
-          <a:ln>
-            <a:noFill/>
-          </a:ln>
-        </p:spPr>
-        <p:txBody>
-          <a:bodyPr spcFirstLastPara="1" wrap="square" lIns="121900" tIns="121900" rIns="121900" bIns="121900" anchor="t" anchorCtr="0">
-            <a:noAutofit/>
-          </a:bodyPr>
-          <a:lstStyle/>
-          <a:p>
-            <a:pPr>
-              <a:buSzPts val="1400"/>
-            </a:pPr>
-            <a:r>
-              <a:rPr lang="en" sz="1867">
-                <a:solidFill>
-                  <a:srgbClr val="274E13"/>
-                </a:solidFill>
-              </a:rPr>
-              <a:t>What outcome are you predicting/estimating?</a:t>
-            </a:r>
-            <a:endParaRPr sz="1867">
-              <a:solidFill>
-                <a:srgbClr val="274E13"/>
-              </a:solidFill>
-            </a:endParaRPr>
-          </a:p>
-          <a:p>
-            <a:pPr>
-              <a:buSzPts val="1400"/>
-            </a:pPr>
-            <a:endParaRPr sz="1867">
-              <a:solidFill>
-                <a:srgbClr val="274E13"/>
-              </a:solidFill>
-            </a:endParaRPr>
-          </a:p>
-          <a:p>
-            <a:pPr>
-              <a:buSzPts val="1400"/>
-            </a:pPr>
-            <a:r>
-              <a:rPr lang="en" sz="1867">
-                <a:solidFill>
-                  <a:srgbClr val="B45F06"/>
-                </a:solidFill>
-              </a:rPr>
-              <a:t>For what purpose?</a:t>
-            </a:r>
-            <a:endParaRPr sz="1867">
-              <a:solidFill>
-                <a:srgbClr val="274E13"/>
-              </a:solidFill>
-            </a:endParaRPr>
-          </a:p>
-        </p:txBody>
-      </p:sp>
-    </p:spTree>
-  </p:cSld>
-  <p:clrMapOvr>
-    <a:masterClrMapping/>
-  </p:clrMapOvr>
-</p:sld>
-</file>
-
-<file path=ppt/slides/slide22.xml><?xml version="1.0" encoding="utf-8"?>
 <p:sld xmlns:a="http://schemas.openxmlformats.org/drawingml/2006/main" xmlns:r="http://schemas.openxmlformats.org/officeDocument/2006/relationships" xmlns:p="http://schemas.openxmlformats.org/presentationml/2006/main">
   <p:cSld>
     <p:spTree>
@@ -9606,6 +9222,109 @@
 </p:sld>
 </file>
 
+<file path=ppt/slides/slide22.xml><?xml version="1.0" encoding="utf-8"?>
+<p:sld xmlns:a="http://schemas.openxmlformats.org/drawingml/2006/main" xmlns:r="http://schemas.openxmlformats.org/officeDocument/2006/relationships" xmlns:p="http://schemas.openxmlformats.org/presentationml/2006/main">
+  <p:cSld>
+    <p:spTree>
+      <p:nvGrpSpPr>
+        <p:cNvPr id="1" name=""/>
+        <p:cNvGrpSpPr/>
+        <p:nvPr/>
+      </p:nvGrpSpPr>
+      <p:grpSpPr>
+        <a:xfrm>
+          <a:off x="0" y="0"/>
+          <a:ext cx="0" cy="0"/>
+          <a:chOff x="0" y="0"/>
+          <a:chExt cx="0" cy="0"/>
+        </a:xfrm>
+      </p:grpSpPr>
+      <p:sp>
+        <p:nvSpPr>
+          <p:cNvPr id="2" name="Text Placeholder 1">
+            <a:extLst>
+              <a:ext uri="{FF2B5EF4-FFF2-40B4-BE49-F238E27FC236}">
+                <a16:creationId xmlns:a16="http://schemas.microsoft.com/office/drawing/2014/main" id="{16F0CF04-B42B-C044-ACCB-6C665E5B57C0}"/>
+              </a:ext>
+            </a:extLst>
+          </p:cNvPr>
+          <p:cNvSpPr>
+            <a:spLocks noGrp="1"/>
+          </p:cNvSpPr>
+          <p:nvPr>
+            <p:ph type="body" idx="1"/>
+          </p:nvPr>
+        </p:nvSpPr>
+        <p:spPr>
+          <a:xfrm>
+            <a:off x="268210" y="2360141"/>
+            <a:ext cx="11666400" cy="4182862"/>
+          </a:xfrm>
+        </p:spPr>
+        <p:txBody>
+          <a:bodyPr/>
+          <a:lstStyle/>
+          <a:p>
+            <a:pPr marL="114300" indent="0" algn="ctr">
+              <a:buNone/>
+            </a:pPr>
+            <a:r>
+              <a:rPr lang="en-US" sz="4800" dirty="0"/>
+              <a:t>What is the appropriate comparison </a:t>
+            </a:r>
+          </a:p>
+          <a:p>
+            <a:pPr marL="114300" indent="0" algn="ctr">
+              <a:buNone/>
+            </a:pPr>
+            <a:r>
+              <a:rPr lang="en-US" sz="4800" dirty="0"/>
+              <a:t>for your ML model?</a:t>
+            </a:r>
+          </a:p>
+        </p:txBody>
+      </p:sp>
+      <p:sp>
+        <p:nvSpPr>
+          <p:cNvPr id="3" name="Title 2">
+            <a:extLst>
+              <a:ext uri="{FF2B5EF4-FFF2-40B4-BE49-F238E27FC236}">
+                <a16:creationId xmlns:a16="http://schemas.microsoft.com/office/drawing/2014/main" id="{FC049B21-A440-624B-941A-2CE526530E5B}"/>
+              </a:ext>
+            </a:extLst>
+          </p:cNvPr>
+          <p:cNvSpPr>
+            <a:spLocks noGrp="1"/>
+          </p:cNvSpPr>
+          <p:nvPr>
+            <p:ph type="title"/>
+          </p:nvPr>
+        </p:nvSpPr>
+        <p:spPr/>
+        <p:txBody>
+          <a:bodyPr/>
+          <a:lstStyle/>
+          <a:p>
+            <a:r>
+              <a:rPr lang="en-US" dirty="0"/>
+              <a:t>Baselines</a:t>
+            </a:r>
+          </a:p>
+        </p:txBody>
+      </p:sp>
+    </p:spTree>
+    <p:extLst>
+      <p:ext uri="{BB962C8B-B14F-4D97-AF65-F5344CB8AC3E}">
+        <p14:creationId xmlns:p14="http://schemas.microsoft.com/office/powerpoint/2010/main" val="1335110213"/>
+      </p:ext>
+    </p:extLst>
+  </p:cSld>
+  <p:clrMapOvr>
+    <a:masterClrMapping/>
+  </p:clrMapOvr>
+</p:sld>
+</file>
+
 <file path=ppt/slides/slide23.xml><?xml version="1.0" encoding="utf-8"?>
 <p:sld xmlns:a="http://schemas.openxmlformats.org/drawingml/2006/main" xmlns:r="http://schemas.openxmlformats.org/officeDocument/2006/relationships" xmlns:p="http://schemas.openxmlformats.org/presentationml/2006/main">
   <p:cSld>
@@ -9641,29 +9360,71 @@
         </p:nvSpPr>
         <p:spPr>
           <a:xfrm>
-            <a:off x="268210" y="2360141"/>
-            <a:ext cx="11666400" cy="4182862"/>
+            <a:off x="262800" y="1403308"/>
+            <a:ext cx="11666400" cy="4954500"/>
           </a:xfrm>
         </p:spPr>
         <p:txBody>
           <a:bodyPr/>
           <a:lstStyle/>
           <a:p>
-            <a:pPr marL="114300" indent="0" algn="ctr">
-              <a:buNone/>
-            </a:pPr>
-            <a:r>
-              <a:rPr lang="en-US" sz="4800" dirty="0"/>
-              <a:t>What is the appropriate comparison </a:t>
-            </a:r>
-          </a:p>
-          <a:p>
-            <a:pPr marL="114300" indent="0" algn="ctr">
-              <a:buNone/>
-            </a:pPr>
-            <a:r>
-              <a:rPr lang="en-US" sz="4800" dirty="0"/>
-              <a:t>for your ML model?</a:t>
+            <a:r>
+              <a:rPr lang="en-US" dirty="0"/>
+              <a:t>Common Sense</a:t>
+            </a:r>
+            <a:br>
+              <a:rPr lang="en-US" dirty="0"/>
+            </a:br>
+            <a:endParaRPr lang="en-US" dirty="0"/>
+          </a:p>
+          <a:p>
+            <a:r>
+              <a:rPr lang="en-US" dirty="0"/>
+              <a:t>What they do today</a:t>
+            </a:r>
+            <a:br>
+              <a:rPr lang="en-US" dirty="0"/>
+            </a:br>
+            <a:endParaRPr lang="en-US" dirty="0"/>
+          </a:p>
+          <a:p>
+            <a:r>
+              <a:rPr lang="en-US" dirty="0"/>
+              <a:t>What they could do today easily (without any or very simple ML involved)</a:t>
+            </a:r>
+            <a:br>
+              <a:rPr lang="en-US" dirty="0"/>
+            </a:br>
+            <a:endParaRPr lang="en-US" dirty="0"/>
+          </a:p>
+          <a:p>
+            <a:r>
+              <a:rPr lang="en-US" dirty="0"/>
+              <a:t>Prior/Base Rate</a:t>
+            </a:r>
+          </a:p>
+          <a:p>
+            <a:pPr lvl="1"/>
+            <a:r>
+              <a:rPr lang="en-US" dirty="0"/>
+              <a:t>What expected value would you get if you just choose at random (based on the data distribution)?</a:t>
+            </a:r>
+            <a:br>
+              <a:rPr lang="en-US" dirty="0"/>
+            </a:br>
+            <a:endParaRPr lang="en-US" dirty="0"/>
+          </a:p>
+          <a:p>
+            <a:r>
+              <a:rPr lang="en-US" dirty="0"/>
+              <a:t>Good baselines should provide an ordering to sort the entities</a:t>
+            </a:r>
+          </a:p>
+          <a:p>
+            <a:pPr lvl="1"/>
+            <a:r>
+              <a:rPr lang="en-US" dirty="0"/>
+              <a:t>Heuristic rules (or shallow decision trees) might reflect current practice, but can yield a small number of unique scores with lots of ties</a:t>
             </a:r>
           </a:p>
         </p:txBody>
@@ -9691,7 +9452,7 @@
           <a:p>
             <a:r>
               <a:rPr lang="en-US" dirty="0"/>
-              <a:t>Baselines</a:t>
+              <a:t>Baseline Options</a:t>
             </a:r>
           </a:p>
         </p:txBody>
@@ -9699,7 +9460,7 @@
     </p:spTree>
     <p:extLst>
       <p:ext uri="{BB962C8B-B14F-4D97-AF65-F5344CB8AC3E}">
-        <p14:creationId xmlns:p14="http://schemas.microsoft.com/office/powerpoint/2010/main" val="1335110213"/>
+        <p14:creationId xmlns:p14="http://schemas.microsoft.com/office/powerpoint/2010/main" val="225707519"/>
       </p:ext>
     </p:extLst>
   </p:cSld>
@@ -9710,7 +9471,7 @@
 </file>
 
 <file path=ppt/slides/slide24.xml><?xml version="1.0" encoding="utf-8"?>
-<p:sld xmlns:a="http://schemas.openxmlformats.org/drawingml/2006/main" xmlns:r="http://schemas.openxmlformats.org/officeDocument/2006/relationships" xmlns:p="http://schemas.openxmlformats.org/presentationml/2006/main">
+<p:sld xmlns:a="http://schemas.openxmlformats.org/drawingml/2006/main" xmlns:r="http://schemas.openxmlformats.org/officeDocument/2006/relationships" xmlns:p="http://schemas.openxmlformats.org/presentationml/2006/main" show="0">
   <p:cSld>
     <p:spTree>
       <p:nvGrpSpPr>
@@ -9728,97 +9489,10 @@
       </p:grpSpPr>
       <p:sp>
         <p:nvSpPr>
-          <p:cNvPr id="2" name="Text Placeholder 1">
-            <a:extLst>
-              <a:ext uri="{FF2B5EF4-FFF2-40B4-BE49-F238E27FC236}">
-                <a16:creationId xmlns:a16="http://schemas.microsoft.com/office/drawing/2014/main" id="{16F0CF04-B42B-C044-ACCB-6C665E5B57C0}"/>
-              </a:ext>
-            </a:extLst>
-          </p:cNvPr>
-          <p:cNvSpPr>
-            <a:spLocks noGrp="1"/>
-          </p:cNvSpPr>
-          <p:nvPr>
-            <p:ph type="body" idx="1"/>
-          </p:nvPr>
-        </p:nvSpPr>
-        <p:spPr>
-          <a:xfrm>
-            <a:off x="262800" y="1403308"/>
-            <a:ext cx="11666400" cy="4954500"/>
-          </a:xfrm>
-        </p:spPr>
-        <p:txBody>
-          <a:bodyPr/>
-          <a:lstStyle/>
-          <a:p>
-            <a:r>
-              <a:rPr lang="en-US" dirty="0"/>
-              <a:t>Common Sense</a:t>
-            </a:r>
-            <a:br>
-              <a:rPr lang="en-US" dirty="0"/>
-            </a:br>
-            <a:endParaRPr lang="en-US" dirty="0"/>
-          </a:p>
-          <a:p>
-            <a:r>
-              <a:rPr lang="en-US" dirty="0"/>
-              <a:t>What they do today</a:t>
-            </a:r>
-            <a:br>
-              <a:rPr lang="en-US" dirty="0"/>
-            </a:br>
-            <a:endParaRPr lang="en-US" dirty="0"/>
-          </a:p>
-          <a:p>
-            <a:r>
-              <a:rPr lang="en-US" dirty="0"/>
-              <a:t>What they could do today easily (without any or very simple ML involved)</a:t>
-            </a:r>
-            <a:br>
-              <a:rPr lang="en-US" dirty="0"/>
-            </a:br>
-            <a:endParaRPr lang="en-US" dirty="0"/>
-          </a:p>
-          <a:p>
-            <a:r>
-              <a:rPr lang="en-US" dirty="0"/>
-              <a:t>Prior/Base Rate</a:t>
-            </a:r>
-          </a:p>
-          <a:p>
-            <a:pPr lvl="1"/>
-            <a:r>
-              <a:rPr lang="en-US" dirty="0"/>
-              <a:t>What expected value would you get if you just choose at random (based on the data distribution)?</a:t>
-            </a:r>
-            <a:br>
-              <a:rPr lang="en-US" dirty="0"/>
-            </a:br>
-            <a:endParaRPr lang="en-US" dirty="0"/>
-          </a:p>
-          <a:p>
-            <a:r>
-              <a:rPr lang="en-US" dirty="0"/>
-              <a:t>Good baselines should provide an ordering to sort the entities</a:t>
-            </a:r>
-          </a:p>
-          <a:p>
-            <a:pPr lvl="1"/>
-            <a:r>
-              <a:rPr lang="en-US" dirty="0"/>
-              <a:t>Heuristic rules (or shallow decision trees) might reflect current practice, but can yield a small number of unique scores with lots of ties</a:t>
-            </a:r>
-          </a:p>
-        </p:txBody>
-      </p:sp>
-      <p:sp>
-        <p:nvSpPr>
           <p:cNvPr id="3" name="Title 2">
             <a:extLst>
               <a:ext uri="{FF2B5EF4-FFF2-40B4-BE49-F238E27FC236}">
-                <a16:creationId xmlns:a16="http://schemas.microsoft.com/office/drawing/2014/main" id="{FC049B21-A440-624B-941A-2CE526530E5B}"/>
+                <a16:creationId xmlns:a16="http://schemas.microsoft.com/office/drawing/2014/main" id="{F7B27DC9-378A-B50B-7138-EED9A5CC7668}"/>
               </a:ext>
             </a:extLst>
           </p:cNvPr>
@@ -9829,14 +9503,82 @@
             <p:ph type="title"/>
           </p:nvPr>
         </p:nvSpPr>
-        <p:spPr/>
+        <p:spPr>
+          <a:xfrm>
+            <a:off x="151106" y="20548"/>
+            <a:ext cx="11360700" cy="763500"/>
+          </a:xfrm>
+        </p:spPr>
         <p:txBody>
           <a:bodyPr/>
           <a:lstStyle/>
           <a:p>
             <a:r>
               <a:rPr lang="en-US" dirty="0"/>
-              <a:t>Baseline Options</a:t>
+              <a:t>For the Netflix example, what would be a reasonable baseline method that doesn't require using any ML?</a:t>
+            </a:r>
+          </a:p>
+        </p:txBody>
+      </p:sp>
+      <p:sp>
+        <p:nvSpPr>
+          <p:cNvPr id="4" name="Text Placeholder 3">
+            <a:extLst>
+              <a:ext uri="{FF2B5EF4-FFF2-40B4-BE49-F238E27FC236}">
+                <a16:creationId xmlns:a16="http://schemas.microsoft.com/office/drawing/2014/main" id="{94D6D19F-3E25-E279-F9A2-3CE77C5E7B1B}"/>
+              </a:ext>
+            </a:extLst>
+          </p:cNvPr>
+          <p:cNvSpPr txBox="1">
+            <a:spLocks noGrp="1"/>
+          </p:cNvSpPr>
+          <p:nvPr>
+            <p:ph type="body" idx="1"/>
+          </p:nvPr>
+        </p:nvSpPr>
+        <p:spPr>
+          <a:xfrm>
+            <a:off x="3683335" y="2031714"/>
+            <a:ext cx="4825330" cy="2794571"/>
+          </a:xfrm>
+          <a:prstGeom prst="rect">
+            <a:avLst/>
+          </a:prstGeom>
+          <a:noFill/>
+        </p:spPr>
+        <p:txBody>
+          <a:bodyPr wrap="none" rtlCol="0">
+            <a:spAutoFit/>
+          </a:bodyPr>
+          <a:lstStyle/>
+          <a:p>
+            <a:pPr marL="114300" indent="0" algn="ctr">
+              <a:buNone/>
+            </a:pPr>
+            <a:r>
+              <a:rPr lang="en-US" sz="4800" dirty="0" err="1"/>
+              <a:t>sli.do</a:t>
+            </a:r>
+            <a:r>
+              <a:rPr lang="en-US" sz="4800" dirty="0"/>
+              <a:t>      #94889</a:t>
+            </a:r>
+          </a:p>
+          <a:p>
+            <a:pPr algn="ctr"/>
+            <a:endParaRPr lang="en-US" sz="4800" dirty="0"/>
+          </a:p>
+          <a:p>
+            <a:pPr marL="114300" indent="0" algn="ctr">
+              <a:buNone/>
+            </a:pPr>
+            <a:r>
+              <a:rPr lang="en-US" sz="4800" dirty="0" err="1"/>
+              <a:t>sli.do</a:t>
+            </a:r>
+            <a:r>
+              <a:rPr lang="en-US" sz="4800" dirty="0"/>
+              <a:t>/94889</a:t>
             </a:r>
           </a:p>
         </p:txBody>
@@ -9844,7 +9586,7 @@
     </p:spTree>
     <p:extLst>
       <p:ext uri="{BB962C8B-B14F-4D97-AF65-F5344CB8AC3E}">
-        <p14:creationId xmlns:p14="http://schemas.microsoft.com/office/powerpoint/2010/main" val="225707519"/>
+        <p14:creationId xmlns:p14="http://schemas.microsoft.com/office/powerpoint/2010/main" val="4141853174"/>
       </p:ext>
     </p:extLst>
   </p:cSld>
@@ -9855,8 +9597,16 @@
 </file>
 
 <file path=ppt/slides/slide25.xml><?xml version="1.0" encoding="utf-8"?>
-<p:sld xmlns:a="http://schemas.openxmlformats.org/drawingml/2006/main" xmlns:r="http://schemas.openxmlformats.org/officeDocument/2006/relationships" xmlns:p="http://schemas.openxmlformats.org/presentationml/2006/main">
+<p:sld xmlns:a="http://schemas.openxmlformats.org/drawingml/2006/main" xmlns:r="http://schemas.openxmlformats.org/officeDocument/2006/relationships" xmlns:p="http://schemas.openxmlformats.org/presentationml/2006/main" showMasterSp="0">
   <p:cSld>
+    <p:bg>
+      <p:bgPr>
+        <a:solidFill>
+          <a:srgbClr val="FFFFFF"/>
+        </a:solidFill>
+        <a:effectLst/>
+      </p:bgPr>
+    </p:bg>
     <p:spTree>
       <p:nvGrpSpPr>
         <p:cNvPr id="1" name=""/>
@@ -9873,110 +9623,501 @@
       </p:grpSpPr>
       <p:sp>
         <p:nvSpPr>
-          <p:cNvPr id="3" name="Title 2">
+          <p:cNvPr id="2" name="Rectangle 1">
             <a:extLst>
               <a:ext uri="{FF2B5EF4-FFF2-40B4-BE49-F238E27FC236}">
-                <a16:creationId xmlns:a16="http://schemas.microsoft.com/office/drawing/2014/main" id="{F7B27DC9-378A-B50B-7138-EED9A5CC7668}"/>
+                <a16:creationId xmlns:a16="http://schemas.microsoft.com/office/drawing/2014/main" id="{F02749D5-EF91-FAEF-B5FE-5BC4C0A1E777}"/>
               </a:ext>
             </a:extLst>
           </p:cNvPr>
-          <p:cNvSpPr>
-            <a:spLocks noGrp="1"/>
-          </p:cNvSpPr>
+          <p:cNvSpPr/>
           <p:nvPr>
-            <p:ph type="title"/>
+            <p:custDataLst>
+              <p:tags r:id="rId2"/>
+            </p:custDataLst>
           </p:nvPr>
         </p:nvSpPr>
         <p:spPr>
           <a:xfrm>
-            <a:off x="151106" y="20548"/>
-            <a:ext cx="11360700" cy="763500"/>
+            <a:off x="444693" y="1742703"/>
+            <a:ext cx="2371696" cy="2371696"/>
           </a:xfrm>
+          <a:prstGeom prst="rect">
+            <a:avLst/>
+          </a:prstGeom>
+          <a:blipFill>
+            <a:blip r:embed="rId5">
+              <a:extLst>
+                <a:ext uri="{96DAC541-7B7A-43D3-8B79-37D633B846F1}">
+                  <asvg:svgBlip xmlns:asvg="http://schemas.microsoft.com/office/drawing/2016/SVG/main" r:embed="rId6"/>
+                </a:ext>
+              </a:extLst>
+            </a:blip>
+            <a:stretch>
+              <a:fillRect/>
+            </a:stretch>
+          </a:blipFill>
+          <a:ln>
+            <a:solidFill>
+              <a:srgbClr val="FFFFFF"/>
+            </a:solidFill>
+          </a:ln>
         </p:spPr>
-        <p:txBody>
-          <a:bodyPr/>
+        <p:style>
+          <a:lnRef idx="2">
+            <a:schemeClr val="accent1">
+              <a:shade val="15000"/>
+            </a:schemeClr>
+          </a:lnRef>
+          <a:fillRef idx="1">
+            <a:schemeClr val="accent1"/>
+          </a:fillRef>
+          <a:effectRef idx="0">
+            <a:schemeClr val="accent1"/>
+          </a:effectRef>
+          <a:fontRef idx="minor">
+            <a:schemeClr val="lt1"/>
+          </a:fontRef>
+        </p:style>
+        <p:txBody>
+          <a:bodyPr rtlCol="0" anchor="ctr"/>
           <a:lstStyle/>
           <a:p>
-            <a:r>
-              <a:rPr lang="en-US" dirty="0"/>
-              <a:t>For the Netflix example, what would be a reasonable baseline method that doesn't require using any ML?</a:t>
-            </a:r>
-          </a:p>
-        </p:txBody>
-      </p:sp>
-      <p:sp>
-        <p:nvSpPr>
-          <p:cNvPr id="4" name="Text Placeholder 3">
+            <a:pPr algn="ctr"/>
+            <a:endParaRPr lang="en-US"/>
+          </a:p>
+        </p:txBody>
+      </p:sp>
+      <p:sp>
+        <p:nvSpPr>
+          <p:cNvPr id="3" name="Rectangle 2">
             <a:extLst>
               <a:ext uri="{FF2B5EF4-FFF2-40B4-BE49-F238E27FC236}">
-                <a16:creationId xmlns:a16="http://schemas.microsoft.com/office/drawing/2014/main" id="{94D6D19F-3E25-E279-F9A2-3CE77C5E7B1B}"/>
+                <a16:creationId xmlns:a16="http://schemas.microsoft.com/office/drawing/2014/main" id="{EE57E54B-91E9-219C-1348-8A8C449C4B31}"/>
               </a:ext>
             </a:extLst>
           </p:cNvPr>
-          <p:cNvSpPr txBox="1">
-            <a:spLocks noGrp="1"/>
-          </p:cNvSpPr>
+          <p:cNvSpPr/>
           <p:nvPr>
-            <p:ph type="body" idx="1"/>
+            <p:custDataLst>
+              <p:tags r:id="rId3"/>
+            </p:custDataLst>
           </p:nvPr>
         </p:nvSpPr>
         <p:spPr>
           <a:xfrm>
-            <a:off x="3683335" y="2031714"/>
-            <a:ext cx="4825330" cy="2794571"/>
+            <a:off x="3112851" y="1000897"/>
+            <a:ext cx="8486226" cy="3855308"/>
           </a:xfrm>
           <a:prstGeom prst="rect">
             <a:avLst/>
           </a:prstGeom>
           <a:noFill/>
+          <a:ln w="25400" cap="flat" cmpd="sng" algn="ctr">
+            <a:solidFill>
+              <a:srgbClr val="FFFFFF"/>
+            </a:solidFill>
+            <a:prstDash val="solid"/>
+          </a:ln>
+          <a:effectLst/>
+          <a:extLst>
+            <a:ext uri="{909E8E84-426E-40DD-AFC4-6F175D3DCCD1}">
+              <a14:hiddenFill xmlns:a14="http://schemas.microsoft.com/office/drawing/2010/main">
+                <a:solidFill>
+                  <a:schemeClr val="accent1"/>
+                </a:solidFill>
+              </a14:hiddenFill>
+            </a:ext>
+          </a:extLst>
         </p:spPr>
-        <p:txBody>
-          <a:bodyPr wrap="none" rtlCol="0">
-            <a:spAutoFit/>
+        <p:style>
+          <a:lnRef idx="2">
+            <a:schemeClr val="accent1">
+              <a:shade val="15000"/>
+            </a:schemeClr>
+          </a:lnRef>
+          <a:fillRef idx="1">
+            <a:schemeClr val="accent1"/>
+          </a:fillRef>
+          <a:effectRef idx="0">
+            <a:schemeClr val="accent1"/>
+          </a:effectRef>
+          <a:fontRef idx="minor">
+            <a:schemeClr val="lt1"/>
+          </a:fontRef>
+        </p:style>
+        <p:txBody>
+          <a:bodyPr rtlCol="0" anchor="ctr"/>
+          <a:lstStyle/>
+          <a:p>
+            <a:r>
+              <a:rPr lang="en-US" sz="2900" b="1">
+                <a:solidFill>
+                  <a:srgbClr val="000000"/>
+                </a:solidFill>
+              </a:rPr>
+              <a:t>For the Netflix example, what would be a reasonable baseline method that doesn't require using any ML?</a:t>
+            </a:r>
+          </a:p>
+        </p:txBody>
+      </p:sp>
+      <p:sp>
+        <p:nvSpPr>
+          <p:cNvPr id="4" name="Rectangle 3">
+            <a:extLst>
+              <a:ext uri="{FF2B5EF4-FFF2-40B4-BE49-F238E27FC236}">
+                <a16:creationId xmlns:a16="http://schemas.microsoft.com/office/drawing/2014/main" id="{E8118BA4-AD6E-95BF-40B4-2A0B2F23655E}"/>
+              </a:ext>
+            </a:extLst>
+          </p:cNvPr>
+          <p:cNvSpPr/>
+          <p:nvPr/>
+        </p:nvSpPr>
+        <p:spPr>
+          <a:xfrm>
+            <a:off x="0" y="5820032"/>
+            <a:ext cx="12192001" cy="1037968"/>
+          </a:xfrm>
+          <a:prstGeom prst="rect">
+            <a:avLst/>
+          </a:prstGeom>
+          <a:solidFill>
+            <a:srgbClr val="198038"/>
+          </a:solidFill>
+          <a:ln w="25400" cap="flat" cmpd="sng" algn="ctr">
+            <a:noFill/>
+            <a:prstDash val="solid"/>
+          </a:ln>
+          <a:effectLst/>
+          <a:extLst>
+            <a:ext uri="{91240B29-F687-4F45-9708-019B960494DF}">
+              <a14:hiddenLine xmlns:a14="http://schemas.microsoft.com/office/drawing/2010/main" w="25400" cap="flat" cmpd="sng" algn="ctr">
+                <a:solidFill>
+                  <a:schemeClr val="accent1">
+                    <a:shade val="15000"/>
+                  </a:schemeClr>
+                </a:solidFill>
+                <a:prstDash val="solid"/>
+              </a14:hiddenLine>
+            </a:ext>
+          </a:extLst>
+        </p:spPr>
+        <p:style>
+          <a:lnRef idx="2">
+            <a:schemeClr val="accent1">
+              <a:shade val="15000"/>
+            </a:schemeClr>
+          </a:lnRef>
+          <a:fillRef idx="1">
+            <a:schemeClr val="accent1"/>
+          </a:fillRef>
+          <a:effectRef idx="0">
+            <a:schemeClr val="accent1"/>
+          </a:effectRef>
+          <a:fontRef idx="minor">
+            <a:schemeClr val="lt1"/>
+          </a:fontRef>
+        </p:style>
+        <p:txBody>
+          <a:bodyPr lIns="741155" tIns="259492" rIns="1852888" bIns="203886" rtlCol="0" anchor="ctr">
+            <a:normAutofit fontScale="85000" lnSpcReduction="10000"/>
           </a:bodyPr>
           <a:lstStyle/>
           <a:p>
-            <a:pPr marL="114300" indent="0" algn="ctr">
-              <a:buNone/>
-            </a:pPr>
-            <a:r>
-              <a:rPr lang="en-US" sz="4800" dirty="0" err="1"/>
-              <a:t>sli.do</a:t>
-            </a:r>
-            <a:r>
-              <a:rPr lang="en-US" sz="4800" dirty="0"/>
-              <a:t>      #94889</a:t>
-            </a:r>
-          </a:p>
+            <a:r>
+              <a:rPr lang="en-US" sz="2600">
+                <a:solidFill>
+                  <a:srgbClr val="FFFFFF"/>
+                </a:solidFill>
+              </a:rPr>
+              <a:t>The </a:t>
+            </a:r>
+            <a:r>
+              <a:rPr lang="en-US" sz="2600">
+                <a:solidFill>
+                  <a:srgbClr val="FFFFFF"/>
+                </a:solidFill>
+                <a:hlinkClick r:id="rId7">
+                  <a:extLst>
+                    <a:ext uri="{A12FA001-AC4F-418D-AE19-62706E023703}">
+                      <ahyp:hlinkClr xmlns:ahyp="http://schemas.microsoft.com/office/drawing/2018/hyperlinkcolor" val="tx"/>
+                    </a:ext>
+                  </a:extLst>
+                </a:hlinkClick>
+              </a:rPr>
+              <a:t>Slido app</a:t>
+            </a:r>
+            <a:r>
+              <a:rPr lang="en-US" sz="2600">
+                <a:solidFill>
+                  <a:srgbClr val="FFFFFF"/>
+                </a:solidFill>
+              </a:rPr>
+              <a:t> must be installed on every computer you’re presenting from</a:t>
+            </a:r>
+          </a:p>
+        </p:txBody>
+      </p:sp>
+      <p:pic>
+        <p:nvPicPr>
+          <p:cNvPr id="6" name="Graphic 5">
+            <a:extLst>
+              <a:ext uri="{FF2B5EF4-FFF2-40B4-BE49-F238E27FC236}">
+                <a16:creationId xmlns:a16="http://schemas.microsoft.com/office/drawing/2014/main" id="{3466649F-18A4-1042-E6DA-8DB8965A4872}"/>
+              </a:ext>
+            </a:extLst>
+          </p:cNvPr>
+          <p:cNvPicPr>
+            <a:picLocks/>
+          </p:cNvPicPr>
+          <p:nvPr/>
+        </p:nvPicPr>
+        <p:blipFill>
+          <a:blip r:embed="rId8">
+            <a:extLst>
+              <a:ext uri="{96DAC541-7B7A-43D3-8B79-37D633B846F1}">
+                <asvg:svgBlip xmlns:asvg="http://schemas.microsoft.com/office/drawing/2016/SVG/main" r:embed="rId9"/>
+              </a:ext>
+            </a:extLst>
+          </a:blip>
+          <a:stretch>
+            <a:fillRect/>
+          </a:stretch>
+        </p:blipFill>
+        <p:spPr>
+          <a:xfrm>
+            <a:off x="296462" y="6190785"/>
+            <a:ext cx="296462" cy="296462"/>
+          </a:xfrm>
+          <a:prstGeom prst="rect">
+            <a:avLst/>
+          </a:prstGeom>
+        </p:spPr>
+      </p:pic>
+      <p:sp>
+        <p:nvSpPr>
+          <p:cNvPr id="7" name="Trapezoid 6">
+            <a:extLst>
+              <a:ext uri="{FF2B5EF4-FFF2-40B4-BE49-F238E27FC236}">
+                <a16:creationId xmlns:a16="http://schemas.microsoft.com/office/drawing/2014/main" id="{016079CA-987D-18DF-87EF-6442FD2D1E69}"/>
+              </a:ext>
+            </a:extLst>
+          </p:cNvPr>
+          <p:cNvSpPr/>
+          <p:nvPr/>
+        </p:nvSpPr>
+        <p:spPr>
+          <a:xfrm rot="2700000">
+            <a:off x="9620371" y="514924"/>
+            <a:ext cx="3335198" cy="778213"/>
+          </a:xfrm>
+          <a:prstGeom prst="trapezoid">
+            <a:avLst>
+              <a:gd name="adj" fmla="val 100000"/>
+            </a:avLst>
+          </a:prstGeom>
+          <a:solidFill>
+            <a:srgbClr val="EDFAF2"/>
+          </a:solidFill>
+          <a:ln w="25400" cap="flat" cmpd="sng" algn="ctr">
+            <a:noFill/>
+            <a:prstDash val="solid"/>
+          </a:ln>
+          <a:effectLst/>
+          <a:extLst>
+            <a:ext uri="{91240B29-F687-4F45-9708-019B960494DF}">
+              <a14:hiddenLine xmlns:a14="http://schemas.microsoft.com/office/drawing/2010/main" w="25400" cap="flat" cmpd="sng" algn="ctr">
+                <a:solidFill>
+                  <a:schemeClr val="accent1">
+                    <a:shade val="15000"/>
+                  </a:schemeClr>
+                </a:solidFill>
+                <a:prstDash val="solid"/>
+              </a14:hiddenLine>
+            </a:ext>
+          </a:extLst>
+        </p:spPr>
+        <p:style>
+          <a:lnRef idx="2">
+            <a:schemeClr val="accent1">
+              <a:shade val="15000"/>
+            </a:schemeClr>
+          </a:lnRef>
+          <a:fillRef idx="1">
+            <a:schemeClr val="accent1"/>
+          </a:fillRef>
+          <a:effectRef idx="0">
+            <a:schemeClr val="accent1"/>
+          </a:effectRef>
+          <a:fontRef idx="minor">
+            <a:schemeClr val="lt1"/>
+          </a:fontRef>
+        </p:style>
+        <p:txBody>
+          <a:bodyPr tIns="0" bIns="0" rtlCol="0" anchor="t">
+            <a:normAutofit fontScale="70000" lnSpcReduction="20000"/>
+          </a:bodyPr>
+          <a:lstStyle/>
           <a:p>
             <a:pPr algn="ctr"/>
-            <a:endParaRPr lang="en-US" sz="4800" dirty="0"/>
-          </a:p>
-          <a:p>
-            <a:pPr marL="114300" indent="0" algn="ctr">
-              <a:buNone/>
-            </a:pPr>
-            <a:r>
-              <a:rPr lang="en-US" sz="4800" dirty="0" err="1"/>
-              <a:t>sli.do</a:t>
-            </a:r>
-            <a:r>
-              <a:rPr lang="en-US" sz="4800" dirty="0"/>
-              <a:t>/94889</a:t>
-            </a:r>
-          </a:p>
-        </p:txBody>
-      </p:sp>
+            <a:r>
+              <a:rPr lang="en-US" sz="2600" b="1">
+                <a:solidFill>
+                  <a:srgbClr val="198038"/>
+                </a:solidFill>
+              </a:rPr>
+              <a:t>Do not edit
+</a:t>
+            </a:r>
+            <a:r>
+              <a:rPr lang="en-US" sz="2200">
+                <a:solidFill>
+                  <a:srgbClr val="198038"/>
+                </a:solidFill>
+                <a:hlinkClick r:id="rId10">
+                  <a:extLst>
+                    <a:ext uri="{A12FA001-AC4F-418D-AE19-62706E023703}">
+                      <ahyp:hlinkClr xmlns:ahyp="http://schemas.microsoft.com/office/drawing/2018/hyperlinkcolor" val="tx"/>
+                    </a:ext>
+                  </a:extLst>
+                </a:hlinkClick>
+              </a:rPr>
+              <a:t>How to change the design</a:t>
+            </a:r>
+            <a:endParaRPr lang="en-US" sz="2200">
+              <a:solidFill>
+                <a:srgbClr val="198038"/>
+              </a:solidFill>
+            </a:endParaRPr>
+          </a:p>
+        </p:txBody>
+      </p:sp>
+      <p:pic>
+        <p:nvPicPr>
+          <p:cNvPr id="9" name="Graphic 8">
+            <a:extLst>
+              <a:ext uri="{FF2B5EF4-FFF2-40B4-BE49-F238E27FC236}">
+                <a16:creationId xmlns:a16="http://schemas.microsoft.com/office/drawing/2014/main" id="{CC2D0B5D-1748-4739-2A61-C73FF33D44DB}"/>
+              </a:ext>
+            </a:extLst>
+          </p:cNvPr>
+          <p:cNvPicPr>
+            <a:picLocks/>
+          </p:cNvPicPr>
+          <p:nvPr/>
+        </p:nvPicPr>
+        <p:blipFill>
+          <a:blip r:embed="rId11">
+            <a:extLst>
+              <a:ext uri="{96DAC541-7B7A-43D3-8B79-37D633B846F1}">
+                <asvg:svgBlip xmlns:asvg="http://schemas.microsoft.com/office/drawing/2016/SVG/main" r:embed="rId12"/>
+              </a:ext>
+            </a:extLst>
+          </a:blip>
+          <a:stretch>
+            <a:fillRect/>
+          </a:stretch>
+        </p:blipFill>
+        <p:spPr>
+          <a:xfrm>
+            <a:off x="10746748" y="6153727"/>
+            <a:ext cx="1111733" cy="370578"/>
+          </a:xfrm>
+          <a:prstGeom prst="rect">
+            <a:avLst/>
+          </a:prstGeom>
+        </p:spPr>
+      </p:pic>
     </p:spTree>
+    <p:custDataLst>
+      <p:tags r:id="rId1"/>
+    </p:custDataLst>
     <p:extLst>
       <p:ext uri="{BB962C8B-B14F-4D97-AF65-F5344CB8AC3E}">
-        <p14:creationId xmlns:p14="http://schemas.microsoft.com/office/powerpoint/2010/main" val="4141853174"/>
+        <p14:creationId xmlns:p14="http://schemas.microsoft.com/office/powerpoint/2010/main" val="1745339197"/>
       </p:ext>
     </p:extLst>
   </p:cSld>
   <p:clrMapOvr>
     <a:masterClrMapping/>
   </p:clrMapOvr>
+  <p:timing>
+    <p:tnLst>
+      <p:par>
+        <p:cTn id="1" dur="indefinite" restart="never" nodeType="tmRoot">
+          <p:childTnLst>
+            <p:seq concurrent="1" nextAc="seek">
+              <p:cTn id="2" dur="indefinite" nodeType="mainSeq">
+                <p:childTnLst>
+                  <p:par>
+                    <p:cTn id="3" fill="hold">
+                      <p:stCondLst>
+                        <p:cond delay="indefinite"/>
+                      </p:stCondLst>
+                      <p:childTnLst>
+                        <p:par>
+                          <p:cTn id="4" fill="hold">
+                            <p:stCondLst>
+                              <p:cond delay="0"/>
+                            </p:stCondLst>
+                            <p:childTnLst>
+                              <p:par>
+                                <p:cTn id="5" presetID="26" presetClass="emph" presetSubtype="0" fill="hold" grpId="0" nodeType="clickEffect">
+                                  <p:stCondLst>
+                                    <p:cond delay="0"/>
+                                  </p:stCondLst>
+                                  <p:childTnLst>
+                                    <p:animEffect transition="out" filter="fade">
+                                      <p:cBhvr>
+                                        <p:cTn id="6" dur="50" tmFilter="0, 0; .2, .5; .8, .5; 1, 0"/>
+                                        <p:tgtEl>
+                                          <p:spTgt spid="3"/>
+                                        </p:tgtEl>
+                                      </p:cBhvr>
+                                    </p:animEffect>
+                                    <p:animScale>
+                                      <p:cBhvr>
+                                        <p:cTn id="7" dur="25" autoRev="1" fill="hold"/>
+                                        <p:tgtEl>
+                                          <p:spTgt spid="3"/>
+                                        </p:tgtEl>
+                                      </p:cBhvr>
+                                      <p:by x="105000" y="105000"/>
+                                    </p:animScale>
+                                  </p:childTnLst>
+                                </p:cTn>
+                              </p:par>
+                            </p:childTnLst>
+                          </p:cTn>
+                        </p:par>
+                      </p:childTnLst>
+                    </p:cTn>
+                  </p:par>
+                </p:childTnLst>
+              </p:cTn>
+              <p:prevCondLst>
+                <p:cond evt="onPrev" delay="0">
+                  <p:tgtEl>
+                    <p:sldTgt/>
+                  </p:tgtEl>
+                </p:cond>
+              </p:prevCondLst>
+              <p:nextCondLst>
+                <p:cond evt="onNext" delay="0">
+                  <p:tgtEl>
+                    <p:sldTgt/>
+                  </p:tgtEl>
+                </p:cond>
+              </p:nextCondLst>
+            </p:seq>
+          </p:childTnLst>
+        </p:cTn>
+      </p:par>
+    </p:tnLst>
+    <p:bldLst>
+      <p:bldP spid="3" grpId="0" animBg="1"/>
+    </p:bldLst>
+  </p:timing>
 </p:sld>
 </file>
 
@@ -10104,94 +10245,6 @@
 </file>
 
 <file path=ppt/slides/slide27.xml><?xml version="1.0" encoding="utf-8"?>
-<p:sld xmlns:a="http://schemas.openxmlformats.org/drawingml/2006/main" xmlns:r="http://schemas.openxmlformats.org/officeDocument/2006/relationships" xmlns:p="http://schemas.openxmlformats.org/presentationml/2006/main">
-  <p:cSld>
-    <p:spTree>
-      <p:nvGrpSpPr>
-        <p:cNvPr id="1" name=""/>
-        <p:cNvGrpSpPr/>
-        <p:nvPr/>
-      </p:nvGrpSpPr>
-      <p:grpSpPr>
-        <a:xfrm>
-          <a:off x="0" y="0"/>
-          <a:ext cx="0" cy="0"/>
-          <a:chOff x="0" y="0"/>
-          <a:chExt cx="0" cy="0"/>
-        </a:xfrm>
-      </p:grpSpPr>
-      <p:sp>
-        <p:nvSpPr>
-          <p:cNvPr id="2" name="Text Placeholder 1">
-            <a:extLst>
-              <a:ext uri="{FF2B5EF4-FFF2-40B4-BE49-F238E27FC236}">
-                <a16:creationId xmlns:a16="http://schemas.microsoft.com/office/drawing/2014/main" id="{853D6B69-44D2-D449-B9CE-63D5E2BFE8A0}"/>
-              </a:ext>
-            </a:extLst>
-          </p:cNvPr>
-          <p:cNvSpPr>
-            <a:spLocks noGrp="1"/>
-          </p:cNvSpPr>
-          <p:nvPr>
-            <p:ph type="body" idx="1"/>
-          </p:nvPr>
-        </p:nvSpPr>
-        <p:spPr>
-          <a:xfrm>
-            <a:off x="268210" y="1600078"/>
-            <a:ext cx="11666400" cy="4954500"/>
-          </a:xfrm>
-        </p:spPr>
-        <p:txBody>
-          <a:bodyPr/>
-          <a:lstStyle/>
-          <a:p>
-            <a:endParaRPr lang="en-US"/>
-          </a:p>
-        </p:txBody>
-      </p:sp>
-      <p:sp>
-        <p:nvSpPr>
-          <p:cNvPr id="3" name="Title 2">
-            <a:extLst>
-              <a:ext uri="{FF2B5EF4-FFF2-40B4-BE49-F238E27FC236}">
-                <a16:creationId xmlns:a16="http://schemas.microsoft.com/office/drawing/2014/main" id="{D3765B02-360A-1F41-913A-E71E561203CC}"/>
-              </a:ext>
-            </a:extLst>
-          </p:cNvPr>
-          <p:cNvSpPr>
-            <a:spLocks noGrp="1"/>
-          </p:cNvSpPr>
-          <p:nvPr>
-            <p:ph type="title"/>
-          </p:nvPr>
-        </p:nvSpPr>
-        <p:spPr/>
-        <p:txBody>
-          <a:bodyPr/>
-          <a:lstStyle/>
-          <a:p>
-            <a:r>
-              <a:rPr lang="en-US" dirty="0"/>
-              <a:t>Baseline Examples</a:t>
-            </a:r>
-          </a:p>
-        </p:txBody>
-      </p:sp>
-    </p:spTree>
-    <p:extLst>
-      <p:ext uri="{BB962C8B-B14F-4D97-AF65-F5344CB8AC3E}">
-        <p14:creationId xmlns:p14="http://schemas.microsoft.com/office/powerpoint/2010/main" val="4120948450"/>
-      </p:ext>
-    </p:extLst>
-  </p:cSld>
-  <p:clrMapOvr>
-    <a:masterClrMapping/>
-  </p:clrMapOvr>
-</p:sld>
-</file>
-
-<file path=ppt/slides/slide28.xml><?xml version="1.0" encoding="utf-8"?>
 <p:sld xmlns:a="http://schemas.openxmlformats.org/drawingml/2006/main" xmlns:r="http://schemas.openxmlformats.org/officeDocument/2006/relationships" xmlns:p="http://schemas.openxmlformats.org/presentationml/2006/main">
   <p:cSld>
     <p:spTree>
@@ -10539,7 +10592,7 @@
 </file>
 
 <file path=ppt/slides/slide5.xml><?xml version="1.0" encoding="utf-8"?>
-<p:sld xmlns:a="http://schemas.openxmlformats.org/drawingml/2006/main" xmlns:r="http://schemas.openxmlformats.org/officeDocument/2006/relationships" xmlns:p="http://schemas.openxmlformats.org/presentationml/2006/main">
+<p:sld xmlns:a="http://schemas.openxmlformats.org/drawingml/2006/main" xmlns:r="http://schemas.openxmlformats.org/officeDocument/2006/relationships" xmlns:p="http://schemas.openxmlformats.org/presentationml/2006/main" show="0">
   <p:cSld>
     <p:spTree>
       <p:nvGrpSpPr>
@@ -10697,6 +10750,531 @@
 </file>
 
 <file path=ppt/slides/slide6.xml><?xml version="1.0" encoding="utf-8"?>
+<p:sld xmlns:a="http://schemas.openxmlformats.org/drawingml/2006/main" xmlns:r="http://schemas.openxmlformats.org/officeDocument/2006/relationships" xmlns:p="http://schemas.openxmlformats.org/presentationml/2006/main" showMasterSp="0">
+  <p:cSld>
+    <p:bg>
+      <p:bgPr>
+        <a:solidFill>
+          <a:srgbClr val="FFFFFF"/>
+        </a:solidFill>
+        <a:effectLst/>
+      </p:bgPr>
+    </p:bg>
+    <p:spTree>
+      <p:nvGrpSpPr>
+        <p:cNvPr id="1" name=""/>
+        <p:cNvGrpSpPr/>
+        <p:nvPr/>
+      </p:nvGrpSpPr>
+      <p:grpSpPr>
+        <a:xfrm>
+          <a:off x="0" y="0"/>
+          <a:ext cx="0" cy="0"/>
+          <a:chOff x="0" y="0"/>
+          <a:chExt cx="0" cy="0"/>
+        </a:xfrm>
+      </p:grpSpPr>
+      <p:sp>
+        <p:nvSpPr>
+          <p:cNvPr id="2" name="Rectangle 1">
+            <a:extLst>
+              <a:ext uri="{FF2B5EF4-FFF2-40B4-BE49-F238E27FC236}">
+                <a16:creationId xmlns:a16="http://schemas.microsoft.com/office/drawing/2014/main" id="{83C0D196-4F6E-1654-0FEB-2D5B9A251945}"/>
+              </a:ext>
+            </a:extLst>
+          </p:cNvPr>
+          <p:cNvSpPr/>
+          <p:nvPr>
+            <p:custDataLst>
+              <p:tags r:id="rId2"/>
+            </p:custDataLst>
+          </p:nvPr>
+        </p:nvSpPr>
+        <p:spPr>
+          <a:xfrm>
+            <a:off x="444693" y="1742703"/>
+            <a:ext cx="2371696" cy="2371696"/>
+          </a:xfrm>
+          <a:prstGeom prst="rect">
+            <a:avLst/>
+          </a:prstGeom>
+          <a:blipFill>
+            <a:blip r:embed="rId5">
+              <a:extLst>
+                <a:ext uri="{96DAC541-7B7A-43D3-8B79-37D633B846F1}">
+                  <asvg:svgBlip xmlns:asvg="http://schemas.microsoft.com/office/drawing/2016/SVG/main" r:embed="rId6"/>
+                </a:ext>
+              </a:extLst>
+            </a:blip>
+            <a:stretch>
+              <a:fillRect/>
+            </a:stretch>
+          </a:blipFill>
+          <a:ln>
+            <a:solidFill>
+              <a:srgbClr val="FFFFFF"/>
+            </a:solidFill>
+          </a:ln>
+        </p:spPr>
+        <p:style>
+          <a:lnRef idx="2">
+            <a:schemeClr val="accent1">
+              <a:shade val="15000"/>
+            </a:schemeClr>
+          </a:lnRef>
+          <a:fillRef idx="1">
+            <a:schemeClr val="accent1"/>
+          </a:fillRef>
+          <a:effectRef idx="0">
+            <a:schemeClr val="accent1"/>
+          </a:effectRef>
+          <a:fontRef idx="minor">
+            <a:schemeClr val="lt1"/>
+          </a:fontRef>
+        </p:style>
+        <p:txBody>
+          <a:bodyPr rtlCol="0" anchor="ctr"/>
+          <a:lstStyle/>
+          <a:p>
+            <a:pPr algn="ctr"/>
+            <a:endParaRPr lang="en-US"/>
+          </a:p>
+        </p:txBody>
+      </p:sp>
+      <p:sp>
+        <p:nvSpPr>
+          <p:cNvPr id="3" name="Rectangle 2">
+            <a:extLst>
+              <a:ext uri="{FF2B5EF4-FFF2-40B4-BE49-F238E27FC236}">
+                <a16:creationId xmlns:a16="http://schemas.microsoft.com/office/drawing/2014/main" id="{1BEA676D-66AB-9537-F75F-81EA69F9A0C8}"/>
+              </a:ext>
+            </a:extLst>
+          </p:cNvPr>
+          <p:cNvSpPr/>
+          <p:nvPr>
+            <p:custDataLst>
+              <p:tags r:id="rId3"/>
+            </p:custDataLst>
+          </p:nvPr>
+        </p:nvSpPr>
+        <p:spPr>
+          <a:xfrm>
+            <a:off x="3112851" y="1000897"/>
+            <a:ext cx="8486226" cy="3855308"/>
+          </a:xfrm>
+          <a:prstGeom prst="rect">
+            <a:avLst/>
+          </a:prstGeom>
+          <a:noFill/>
+          <a:ln w="25400" cap="flat" cmpd="sng" algn="ctr">
+            <a:solidFill>
+              <a:srgbClr val="FFFFFF"/>
+            </a:solidFill>
+            <a:prstDash val="solid"/>
+          </a:ln>
+          <a:effectLst/>
+          <a:extLst>
+            <a:ext uri="{909E8E84-426E-40DD-AFC4-6F175D3DCCD1}">
+              <a14:hiddenFill xmlns:a14="http://schemas.microsoft.com/office/drawing/2010/main">
+                <a:solidFill>
+                  <a:schemeClr val="accent1"/>
+                </a:solidFill>
+              </a14:hiddenFill>
+            </a:ext>
+          </a:extLst>
+        </p:spPr>
+        <p:style>
+          <a:lnRef idx="2">
+            <a:schemeClr val="accent1">
+              <a:shade val="15000"/>
+            </a:schemeClr>
+          </a:lnRef>
+          <a:fillRef idx="1">
+            <a:schemeClr val="accent1"/>
+          </a:fillRef>
+          <a:effectRef idx="0">
+            <a:schemeClr val="accent1"/>
+          </a:effectRef>
+          <a:fontRef idx="minor">
+            <a:schemeClr val="lt1"/>
+          </a:fontRef>
+        </p:style>
+        <p:txBody>
+          <a:bodyPr rtlCol="0" anchor="ctr"/>
+          <a:lstStyle/>
+          <a:p>
+            <a:r>
+              <a:rPr lang="en-US" sz="3800" b="1">
+                <a:solidFill>
+                  <a:srgbClr val="000000"/>
+                </a:solidFill>
+              </a:rPr>
+              <a:t>In the Obermeyer et al. reading, what formulation decision is the focus of the paper?</a:t>
+            </a:r>
+          </a:p>
+        </p:txBody>
+      </p:sp>
+      <p:sp>
+        <p:nvSpPr>
+          <p:cNvPr id="4" name="Rectangle 3">
+            <a:extLst>
+              <a:ext uri="{FF2B5EF4-FFF2-40B4-BE49-F238E27FC236}">
+                <a16:creationId xmlns:a16="http://schemas.microsoft.com/office/drawing/2014/main" id="{3A901A59-A0B5-993C-677B-551090B3C84E}"/>
+              </a:ext>
+            </a:extLst>
+          </p:cNvPr>
+          <p:cNvSpPr/>
+          <p:nvPr/>
+        </p:nvSpPr>
+        <p:spPr>
+          <a:xfrm>
+            <a:off x="0" y="5820032"/>
+            <a:ext cx="12192001" cy="1037968"/>
+          </a:xfrm>
+          <a:prstGeom prst="rect">
+            <a:avLst/>
+          </a:prstGeom>
+          <a:solidFill>
+            <a:srgbClr val="198038"/>
+          </a:solidFill>
+          <a:ln w="25400" cap="flat" cmpd="sng" algn="ctr">
+            <a:noFill/>
+            <a:prstDash val="solid"/>
+          </a:ln>
+          <a:effectLst/>
+          <a:extLst>
+            <a:ext uri="{91240B29-F687-4F45-9708-019B960494DF}">
+              <a14:hiddenLine xmlns:a14="http://schemas.microsoft.com/office/drawing/2010/main" w="25400" cap="flat" cmpd="sng" algn="ctr">
+                <a:solidFill>
+                  <a:schemeClr val="accent1">
+                    <a:shade val="15000"/>
+                  </a:schemeClr>
+                </a:solidFill>
+                <a:prstDash val="solid"/>
+              </a14:hiddenLine>
+            </a:ext>
+          </a:extLst>
+        </p:spPr>
+        <p:style>
+          <a:lnRef idx="2">
+            <a:schemeClr val="accent1">
+              <a:shade val="15000"/>
+            </a:schemeClr>
+          </a:lnRef>
+          <a:fillRef idx="1">
+            <a:schemeClr val="accent1"/>
+          </a:fillRef>
+          <a:effectRef idx="0">
+            <a:schemeClr val="accent1"/>
+          </a:effectRef>
+          <a:fontRef idx="minor">
+            <a:schemeClr val="lt1"/>
+          </a:fontRef>
+        </p:style>
+        <p:txBody>
+          <a:bodyPr lIns="741155" tIns="259492" rIns="1852888" bIns="203886" rtlCol="0" anchor="ctr">
+            <a:normAutofit fontScale="85000" lnSpcReduction="10000"/>
+          </a:bodyPr>
+          <a:lstStyle/>
+          <a:p>
+            <a:r>
+              <a:rPr lang="en-US" sz="2600">
+                <a:solidFill>
+                  <a:srgbClr val="FFFFFF"/>
+                </a:solidFill>
+              </a:rPr>
+              <a:t>The </a:t>
+            </a:r>
+            <a:r>
+              <a:rPr lang="en-US" sz="2600">
+                <a:solidFill>
+                  <a:srgbClr val="FFFFFF"/>
+                </a:solidFill>
+                <a:hlinkClick r:id="rId7">
+                  <a:extLst>
+                    <a:ext uri="{A12FA001-AC4F-418D-AE19-62706E023703}">
+                      <ahyp:hlinkClr xmlns:ahyp="http://schemas.microsoft.com/office/drawing/2018/hyperlinkcolor" val="tx"/>
+                    </a:ext>
+                  </a:extLst>
+                </a:hlinkClick>
+              </a:rPr>
+              <a:t>Slido app</a:t>
+            </a:r>
+            <a:r>
+              <a:rPr lang="en-US" sz="2600">
+                <a:solidFill>
+                  <a:srgbClr val="FFFFFF"/>
+                </a:solidFill>
+              </a:rPr>
+              <a:t> must be installed on every computer you’re presenting from</a:t>
+            </a:r>
+          </a:p>
+        </p:txBody>
+      </p:sp>
+      <p:pic>
+        <p:nvPicPr>
+          <p:cNvPr id="6" name="Graphic 5">
+            <a:extLst>
+              <a:ext uri="{FF2B5EF4-FFF2-40B4-BE49-F238E27FC236}">
+                <a16:creationId xmlns:a16="http://schemas.microsoft.com/office/drawing/2014/main" id="{188D9015-4652-4A4E-7510-67BFEF8CCA29}"/>
+              </a:ext>
+            </a:extLst>
+          </p:cNvPr>
+          <p:cNvPicPr>
+            <a:picLocks/>
+          </p:cNvPicPr>
+          <p:nvPr/>
+        </p:nvPicPr>
+        <p:blipFill>
+          <a:blip r:embed="rId8">
+            <a:extLst>
+              <a:ext uri="{96DAC541-7B7A-43D3-8B79-37D633B846F1}">
+                <asvg:svgBlip xmlns:asvg="http://schemas.microsoft.com/office/drawing/2016/SVG/main" r:embed="rId9"/>
+              </a:ext>
+            </a:extLst>
+          </a:blip>
+          <a:stretch>
+            <a:fillRect/>
+          </a:stretch>
+        </p:blipFill>
+        <p:spPr>
+          <a:xfrm>
+            <a:off x="296462" y="6190785"/>
+            <a:ext cx="296462" cy="296462"/>
+          </a:xfrm>
+          <a:prstGeom prst="rect">
+            <a:avLst/>
+          </a:prstGeom>
+        </p:spPr>
+      </p:pic>
+      <p:sp>
+        <p:nvSpPr>
+          <p:cNvPr id="7" name="Trapezoid 6">
+            <a:extLst>
+              <a:ext uri="{FF2B5EF4-FFF2-40B4-BE49-F238E27FC236}">
+                <a16:creationId xmlns:a16="http://schemas.microsoft.com/office/drawing/2014/main" id="{30EE42DA-4FF9-8746-8D88-52D4612A125C}"/>
+              </a:ext>
+            </a:extLst>
+          </p:cNvPr>
+          <p:cNvSpPr/>
+          <p:nvPr/>
+        </p:nvSpPr>
+        <p:spPr>
+          <a:xfrm rot="2700000">
+            <a:off x="9620371" y="514924"/>
+            <a:ext cx="3335198" cy="778213"/>
+          </a:xfrm>
+          <a:prstGeom prst="trapezoid">
+            <a:avLst>
+              <a:gd name="adj" fmla="val 100000"/>
+            </a:avLst>
+          </a:prstGeom>
+          <a:solidFill>
+            <a:srgbClr val="EDFAF2"/>
+          </a:solidFill>
+          <a:ln w="25400" cap="flat" cmpd="sng" algn="ctr">
+            <a:noFill/>
+            <a:prstDash val="solid"/>
+          </a:ln>
+          <a:effectLst/>
+          <a:extLst>
+            <a:ext uri="{91240B29-F687-4F45-9708-019B960494DF}">
+              <a14:hiddenLine xmlns:a14="http://schemas.microsoft.com/office/drawing/2010/main" w="25400" cap="flat" cmpd="sng" algn="ctr">
+                <a:solidFill>
+                  <a:schemeClr val="accent1">
+                    <a:shade val="15000"/>
+                  </a:schemeClr>
+                </a:solidFill>
+                <a:prstDash val="solid"/>
+              </a14:hiddenLine>
+            </a:ext>
+          </a:extLst>
+        </p:spPr>
+        <p:style>
+          <a:lnRef idx="2">
+            <a:schemeClr val="accent1">
+              <a:shade val="15000"/>
+            </a:schemeClr>
+          </a:lnRef>
+          <a:fillRef idx="1">
+            <a:schemeClr val="accent1"/>
+          </a:fillRef>
+          <a:effectRef idx="0">
+            <a:schemeClr val="accent1"/>
+          </a:effectRef>
+          <a:fontRef idx="minor">
+            <a:schemeClr val="lt1"/>
+          </a:fontRef>
+        </p:style>
+        <p:txBody>
+          <a:bodyPr tIns="0" bIns="0" rtlCol="0" anchor="t">
+            <a:normAutofit fontScale="70000" lnSpcReduction="20000"/>
+          </a:bodyPr>
+          <a:lstStyle/>
+          <a:p>
+            <a:pPr algn="ctr"/>
+            <a:r>
+              <a:rPr lang="en-US" sz="2600" b="1">
+                <a:solidFill>
+                  <a:srgbClr val="198038"/>
+                </a:solidFill>
+              </a:rPr>
+              <a:t>Do not edit
+</a:t>
+            </a:r>
+            <a:r>
+              <a:rPr lang="en-US" sz="2200">
+                <a:solidFill>
+                  <a:srgbClr val="198038"/>
+                </a:solidFill>
+                <a:hlinkClick r:id="rId10">
+                  <a:extLst>
+                    <a:ext uri="{A12FA001-AC4F-418D-AE19-62706E023703}">
+                      <ahyp:hlinkClr xmlns:ahyp="http://schemas.microsoft.com/office/drawing/2018/hyperlinkcolor" val="tx"/>
+                    </a:ext>
+                  </a:extLst>
+                </a:hlinkClick>
+              </a:rPr>
+              <a:t>How to change the design</a:t>
+            </a:r>
+            <a:endParaRPr lang="en-US" sz="2200">
+              <a:solidFill>
+                <a:srgbClr val="198038"/>
+              </a:solidFill>
+            </a:endParaRPr>
+          </a:p>
+        </p:txBody>
+      </p:sp>
+      <p:pic>
+        <p:nvPicPr>
+          <p:cNvPr id="9" name="Graphic 8">
+            <a:extLst>
+              <a:ext uri="{FF2B5EF4-FFF2-40B4-BE49-F238E27FC236}">
+                <a16:creationId xmlns:a16="http://schemas.microsoft.com/office/drawing/2014/main" id="{7DB1C380-95DD-02D8-FD24-C9FFFABFC138}"/>
+              </a:ext>
+            </a:extLst>
+          </p:cNvPr>
+          <p:cNvPicPr>
+            <a:picLocks/>
+          </p:cNvPicPr>
+          <p:nvPr/>
+        </p:nvPicPr>
+        <p:blipFill>
+          <a:blip r:embed="rId11">
+            <a:extLst>
+              <a:ext uri="{96DAC541-7B7A-43D3-8B79-37D633B846F1}">
+                <asvg:svgBlip xmlns:asvg="http://schemas.microsoft.com/office/drawing/2016/SVG/main" r:embed="rId12"/>
+              </a:ext>
+            </a:extLst>
+          </a:blip>
+          <a:stretch>
+            <a:fillRect/>
+          </a:stretch>
+        </p:blipFill>
+        <p:spPr>
+          <a:xfrm>
+            <a:off x="10746748" y="6153727"/>
+            <a:ext cx="1111733" cy="370578"/>
+          </a:xfrm>
+          <a:prstGeom prst="rect">
+            <a:avLst/>
+          </a:prstGeom>
+        </p:spPr>
+      </p:pic>
+    </p:spTree>
+    <p:custDataLst>
+      <p:tags r:id="rId1"/>
+    </p:custDataLst>
+    <p:extLst>
+      <p:ext uri="{BB962C8B-B14F-4D97-AF65-F5344CB8AC3E}">
+        <p14:creationId xmlns:p14="http://schemas.microsoft.com/office/powerpoint/2010/main" val="3202293660"/>
+      </p:ext>
+    </p:extLst>
+  </p:cSld>
+  <p:clrMapOvr>
+    <a:masterClrMapping/>
+  </p:clrMapOvr>
+  <p:timing>
+    <p:tnLst>
+      <p:par>
+        <p:cTn id="1" dur="indefinite" restart="never" nodeType="tmRoot">
+          <p:childTnLst>
+            <p:seq concurrent="1" nextAc="seek">
+              <p:cTn id="2" dur="indefinite" nodeType="mainSeq">
+                <p:childTnLst>
+                  <p:par>
+                    <p:cTn id="3" fill="hold">
+                      <p:stCondLst>
+                        <p:cond delay="indefinite"/>
+                      </p:stCondLst>
+                      <p:childTnLst>
+                        <p:par>
+                          <p:cTn id="4" fill="hold">
+                            <p:stCondLst>
+                              <p:cond delay="0"/>
+                            </p:stCondLst>
+                            <p:childTnLst>
+                              <p:par>
+                                <p:cTn id="5" presetID="26" presetClass="emph" presetSubtype="0" fill="hold" grpId="0" nodeType="clickEffect">
+                                  <p:stCondLst>
+                                    <p:cond delay="0"/>
+                                  </p:stCondLst>
+                                  <p:childTnLst>
+                                    <p:animEffect transition="out" filter="fade">
+                                      <p:cBhvr>
+                                        <p:cTn id="6" dur="50" tmFilter="0, 0; .2, .5; .8, .5; 1, 0"/>
+                                        <p:tgtEl>
+                                          <p:spTgt spid="3"/>
+                                        </p:tgtEl>
+                                      </p:cBhvr>
+                                    </p:animEffect>
+                                    <p:animScale>
+                                      <p:cBhvr>
+                                        <p:cTn id="7" dur="25" autoRev="1" fill="hold"/>
+                                        <p:tgtEl>
+                                          <p:spTgt spid="3"/>
+                                        </p:tgtEl>
+                                      </p:cBhvr>
+                                      <p:by x="105000" y="105000"/>
+                                    </p:animScale>
+                                  </p:childTnLst>
+                                </p:cTn>
+                              </p:par>
+                            </p:childTnLst>
+                          </p:cTn>
+                        </p:par>
+                      </p:childTnLst>
+                    </p:cTn>
+                  </p:par>
+                </p:childTnLst>
+              </p:cTn>
+              <p:prevCondLst>
+                <p:cond evt="onPrev" delay="0">
+                  <p:tgtEl>
+                    <p:sldTgt/>
+                  </p:tgtEl>
+                </p:cond>
+              </p:prevCondLst>
+              <p:nextCondLst>
+                <p:cond evt="onNext" delay="0">
+                  <p:tgtEl>
+                    <p:sldTgt/>
+                  </p:tgtEl>
+                </p:cond>
+              </p:nextCondLst>
+            </p:seq>
+          </p:childTnLst>
+        </p:cTn>
+      </p:par>
+    </p:tnLst>
+    <p:bldLst>
+      <p:bldP spid="3" grpId="0" animBg="1"/>
+    </p:bldLst>
+  </p:timing>
+</p:sld>
+</file>
+
+<file path=ppt/slides/slide7.xml><?xml version="1.0" encoding="utf-8"?>
 <p:sld xmlns:a="http://schemas.openxmlformats.org/drawingml/2006/main" xmlns:r="http://schemas.openxmlformats.org/officeDocument/2006/relationships" xmlns:p="http://schemas.openxmlformats.org/presentationml/2006/main">
   <p:cSld>
     <p:spTree>
@@ -11109,96 +11687,6 @@
 </p:sld>
 </file>
 
-<file path=ppt/slides/slide7.xml><?xml version="1.0" encoding="utf-8"?>
-<p:sld xmlns:a="http://schemas.openxmlformats.org/drawingml/2006/main" xmlns:r="http://schemas.openxmlformats.org/officeDocument/2006/relationships" xmlns:p="http://schemas.openxmlformats.org/presentationml/2006/main">
-  <p:cSld>
-    <p:spTree>
-      <p:nvGrpSpPr>
-        <p:cNvPr id="1" name=""/>
-        <p:cNvGrpSpPr/>
-        <p:nvPr/>
-      </p:nvGrpSpPr>
-      <p:grpSpPr>
-        <a:xfrm>
-          <a:off x="0" y="0"/>
-          <a:ext cx="0" cy="0"/>
-          <a:chOff x="0" y="0"/>
-          <a:chExt cx="0" cy="0"/>
-        </a:xfrm>
-      </p:grpSpPr>
-      <p:sp>
-        <p:nvSpPr>
-          <p:cNvPr id="2" name="Text Placeholder 1">
-            <a:extLst>
-              <a:ext uri="{FF2B5EF4-FFF2-40B4-BE49-F238E27FC236}">
-                <a16:creationId xmlns:a16="http://schemas.microsoft.com/office/drawing/2014/main" id="{4F90177E-EDBA-BC41-B606-574933A1A307}"/>
-              </a:ext>
-            </a:extLst>
-          </p:cNvPr>
-          <p:cNvSpPr>
-            <a:spLocks noGrp="1"/>
-          </p:cNvSpPr>
-          <p:nvPr>
-            <p:ph type="body" idx="1"/>
-          </p:nvPr>
-        </p:nvSpPr>
-        <p:spPr/>
-        <p:txBody>
-          <a:bodyPr/>
-          <a:lstStyle/>
-          <a:p>
-            <a:r>
-              <a:rPr lang="en-US" dirty="0"/>
-              <a:t>What type of analysis are you doing?</a:t>
-            </a:r>
-            <a:br>
-              <a:rPr lang="en-US" dirty="0"/>
-            </a:br>
-            <a:endParaRPr lang="en-US" dirty="0"/>
-          </a:p>
-        </p:txBody>
-      </p:sp>
-      <p:sp>
-        <p:nvSpPr>
-          <p:cNvPr id="3" name="Title 2">
-            <a:extLst>
-              <a:ext uri="{FF2B5EF4-FFF2-40B4-BE49-F238E27FC236}">
-                <a16:creationId xmlns:a16="http://schemas.microsoft.com/office/drawing/2014/main" id="{FC4F2F47-A164-2C41-A1CD-CFD1AFCBE708}"/>
-              </a:ext>
-            </a:extLst>
-          </p:cNvPr>
-          <p:cNvSpPr>
-            <a:spLocks noGrp="1"/>
-          </p:cNvSpPr>
-          <p:nvPr>
-            <p:ph type="title"/>
-          </p:nvPr>
-        </p:nvSpPr>
-        <p:spPr/>
-        <p:txBody>
-          <a:bodyPr/>
-          <a:lstStyle/>
-          <a:p>
-            <a:r>
-              <a:rPr lang="en-US" dirty="0"/>
-              <a:t>Decisions we need to make</a:t>
-            </a:r>
-          </a:p>
-        </p:txBody>
-      </p:sp>
-    </p:spTree>
-    <p:extLst>
-      <p:ext uri="{BB962C8B-B14F-4D97-AF65-F5344CB8AC3E}">
-        <p14:creationId xmlns:p14="http://schemas.microsoft.com/office/powerpoint/2010/main" val="3163189124"/>
-      </p:ext>
-    </p:extLst>
-  </p:cSld>
-  <p:clrMapOvr>
-    <a:masterClrMapping/>
-  </p:clrMapOvr>
-</p:sld>
-</file>
-
 <file path=ppt/slides/slide8.xml><?xml version="1.0" encoding="utf-8"?>
 <p:sld xmlns:a="http://schemas.openxmlformats.org/drawingml/2006/main" xmlns:r="http://schemas.openxmlformats.org/officeDocument/2006/relationships" xmlns:p="http://schemas.openxmlformats.org/presentationml/2006/main">
   <p:cSld>
@@ -11221,7 +11709,7 @@
           <p:cNvPr id="2" name="Text Placeholder 1">
             <a:extLst>
               <a:ext uri="{FF2B5EF4-FFF2-40B4-BE49-F238E27FC236}">
-                <a16:creationId xmlns:a16="http://schemas.microsoft.com/office/drawing/2014/main" id="{1BF58D61-D951-4047-914F-96A26849E50A}"/>
+                <a16:creationId xmlns:a16="http://schemas.microsoft.com/office/drawing/2014/main" id="{4F90177E-EDBA-BC41-B606-574933A1A307}"/>
               </a:ext>
             </a:extLst>
           </p:cNvPr>
@@ -11239,38 +11727,12 @@
           <a:p>
             <a:r>
               <a:rPr lang="en-US" dirty="0"/>
-              <a:t>Description</a:t>
-            </a:r>
-          </a:p>
-          <a:p>
-            <a:r>
+              <a:t>What type of analysis are you doing?</a:t>
+            </a:r>
+            <a:br>
               <a:rPr lang="en-US" dirty="0"/>
-              <a:t>Classification</a:t>
-            </a:r>
-          </a:p>
-          <a:p>
-            <a:r>
-              <a:rPr lang="en-US" dirty="0"/>
-              <a:t>Detection</a:t>
-            </a:r>
-          </a:p>
-          <a:p>
-            <a:r>
-              <a:rPr lang="en-US" dirty="0"/>
-              <a:t>Prediction</a:t>
-            </a:r>
-          </a:p>
-          <a:p>
-            <a:r>
-              <a:rPr lang="en-US" dirty="0"/>
-              <a:t>Optimization</a:t>
-            </a:r>
-          </a:p>
-          <a:p>
-            <a:r>
-              <a:rPr lang="en-US" dirty="0"/>
-              <a:t>Causal Inference</a:t>
-            </a:r>
+            </a:br>
+            <a:endParaRPr lang="en-US" dirty="0"/>
           </a:p>
         </p:txBody>
       </p:sp>
@@ -11279,7 +11741,7 @@
           <p:cNvPr id="3" name="Title 2">
             <a:extLst>
               <a:ext uri="{FF2B5EF4-FFF2-40B4-BE49-F238E27FC236}">
-                <a16:creationId xmlns:a16="http://schemas.microsoft.com/office/drawing/2014/main" id="{18E00A3A-9C26-1B42-A62C-4DB46B741290}"/>
+                <a16:creationId xmlns:a16="http://schemas.microsoft.com/office/drawing/2014/main" id="{FC4F2F47-A164-2C41-A1CD-CFD1AFCBE708}"/>
               </a:ext>
             </a:extLst>
           </p:cNvPr>
@@ -11297,7 +11759,7 @@
           <a:p>
             <a:r>
               <a:rPr lang="en-US" dirty="0"/>
-              <a:t>Decisions we need to make: analytical approach</a:t>
+              <a:t>Decisions we need to make</a:t>
             </a:r>
           </a:p>
         </p:txBody>
@@ -11305,7 +11767,7 @@
     </p:spTree>
     <p:extLst>
       <p:ext uri="{BB962C8B-B14F-4D97-AF65-F5344CB8AC3E}">
-        <p14:creationId xmlns:p14="http://schemas.microsoft.com/office/powerpoint/2010/main" val="625908078"/>
+        <p14:creationId xmlns:p14="http://schemas.microsoft.com/office/powerpoint/2010/main" val="3163189124"/>
       </p:ext>
     </p:extLst>
   </p:cSld>
@@ -11337,7 +11799,7 @@
           <p:cNvPr id="2" name="Text Placeholder 1">
             <a:extLst>
               <a:ext uri="{FF2B5EF4-FFF2-40B4-BE49-F238E27FC236}">
-                <a16:creationId xmlns:a16="http://schemas.microsoft.com/office/drawing/2014/main" id="{4F90177E-EDBA-BC41-B606-574933A1A307}"/>
+                <a16:creationId xmlns:a16="http://schemas.microsoft.com/office/drawing/2014/main" id="{1BF58D61-D951-4047-914F-96A26849E50A}"/>
               </a:ext>
             </a:extLst>
           </p:cNvPr>
@@ -11355,24 +11817,44 @@
           <a:p>
             <a:r>
               <a:rPr lang="en-US" dirty="0"/>
-              <a:t>What type of analysis are you doing?</a:t>
-            </a:r>
-          </a:p>
-          <a:p>
-            <a:endParaRPr lang="en-US" dirty="0"/>
+              <a:t>Description</a:t>
+            </a:r>
           </a:p>
           <a:p>
             <a:r>
               <a:rPr lang="en-US" dirty="0"/>
-              <a:t>What are the relevant entities? How do you identify the cohort?</a:t>
-            </a:r>
-            <a:br>
+              <a:t>Classification</a:t>
+            </a:r>
+          </a:p>
+          <a:p>
+            <a:r>
               <a:rPr lang="en-US" dirty="0"/>
-            </a:br>
-            <a:br>
+              <a:t>Detection</a:t>
+            </a:r>
+          </a:p>
+          <a:p>
+            <a:r>
               <a:rPr lang="en-US" dirty="0"/>
-            </a:br>
-            <a:endParaRPr lang="en-US" dirty="0"/>
+              <a:t>Prediction</a:t>
+            </a:r>
+          </a:p>
+          <a:p>
+            <a:r>
+              <a:rPr lang="en-US" dirty="0"/>
+              <a:t>Generation</a:t>
+            </a:r>
+          </a:p>
+          <a:p>
+            <a:r>
+              <a:rPr lang="en-US" dirty="0"/>
+              <a:t>Optimization</a:t>
+            </a:r>
+          </a:p>
+          <a:p>
+            <a:r>
+              <a:rPr lang="en-US" dirty="0"/>
+              <a:t>Causal Inference</a:t>
+            </a:r>
           </a:p>
         </p:txBody>
       </p:sp>
@@ -11381,7 +11863,7 @@
           <p:cNvPr id="3" name="Title 2">
             <a:extLst>
               <a:ext uri="{FF2B5EF4-FFF2-40B4-BE49-F238E27FC236}">
-                <a16:creationId xmlns:a16="http://schemas.microsoft.com/office/drawing/2014/main" id="{FC4F2F47-A164-2C41-A1CD-CFD1AFCBE708}"/>
+                <a16:creationId xmlns:a16="http://schemas.microsoft.com/office/drawing/2014/main" id="{18E00A3A-9C26-1B42-A62C-4DB46B741290}"/>
               </a:ext>
             </a:extLst>
           </p:cNvPr>
@@ -11399,7 +11881,7 @@
           <a:p>
             <a:r>
               <a:rPr lang="en-US" dirty="0"/>
-              <a:t>Decisions we need to make</a:t>
+              <a:t>Decisions we need to make: analytical approach</a:t>
             </a:r>
           </a:p>
         </p:txBody>
@@ -11407,7 +11889,7 @@
     </p:spTree>
     <p:extLst>
       <p:ext uri="{BB962C8B-B14F-4D97-AF65-F5344CB8AC3E}">
-        <p14:creationId xmlns:p14="http://schemas.microsoft.com/office/powerpoint/2010/main" val="2244128218"/>
+        <p14:creationId xmlns:p14="http://schemas.microsoft.com/office/powerpoint/2010/main" val="625908078"/>
       </p:ext>
     </p:extLst>
   </p:cSld>
@@ -11415,6 +11897,57 @@
     <a:masterClrMapping/>
   </p:clrMapOvr>
 </p:sld>
+</file>
+
+<file path=ppt/tags/tag1.xml><?xml version="1.0" encoding="utf-8"?>
+<p:tagLst xmlns:a="http://schemas.openxmlformats.org/drawingml/2006/main" xmlns:r="http://schemas.openxmlformats.org/officeDocument/2006/relationships" xmlns:p="http://schemas.openxmlformats.org/presentationml/2006/main">
+  <p:tag name="SLIDO_APP_VERSION" val="1.5.0.0"/>
+  <p:tag name="SLIDO_PRESENTATION_ID" val="42dfb5fc-ac72-45e1-b454-03a491153cc4"/>
+  <p:tag name="SLIDO_EVENT_UUID" val="606d3060-a568-4588-a241-3a97192e31fe"/>
+  <p:tag name="SLIDO_EVENT_SECTION_UUID" val="07e0abdb-b0f8-4b83-94f8-1a04124a2d9c"/>
+</p:tagLst>
+</file>
+
+<file path=ppt/tags/tag2.xml><?xml version="1.0" encoding="utf-8"?>
+<p:tagLst xmlns:a="http://schemas.openxmlformats.org/drawingml/2006/main" xmlns:r="http://schemas.openxmlformats.org/officeDocument/2006/relationships" xmlns:p="http://schemas.openxmlformats.org/presentationml/2006/main">
+  <p:tag name="SLIDO_TYPE" val="SlidoPoll"/>
+  <p:tag name="SLIDO_POLL_UUID" val="b75de85b-a297-4d64-bfe6-9216da9f4c00"/>
+  <p:tag name="SLIDO_TIMELINE" val="W3sic2hvd1Jlc3VsdHMiOmZhbHNlLCJwb2xsUXVlc3Rpb25VdWlkIjoiOTZjMTA1YjEtZjNiMi00MTMwLWJjMjctYWQ0NjUxY2Q2OGJhIn0seyJzaG93UmVzdWx0cyI6dHJ1ZSwicG9sbFF1ZXN0aW9uVXVpZCI6Ijk2YzEwNWIxLWYzYjItNDEzMC1iYzI3LWFkNDY1MWNkNjhiYSJ9XQ=="/>
+</p:tagLst>
+</file>
+
+<file path=ppt/tags/tag3.xml><?xml version="1.0" encoding="utf-8"?>
+<p:tagLst xmlns:a="http://schemas.openxmlformats.org/drawingml/2006/main" xmlns:r="http://schemas.openxmlformats.org/officeDocument/2006/relationships" xmlns:p="http://schemas.openxmlformats.org/presentationml/2006/main">
+  <p:tag name="SLIDO_ELEMENT" val="interaction_image"/>
+  <p:tag name="INTERACTION_TYPE" val="OpenText"/>
+</p:tagLst>
+</file>
+
+<file path=ppt/tags/tag4.xml><?xml version="1.0" encoding="utf-8"?>
+<p:tagLst xmlns:a="http://schemas.openxmlformats.org/drawingml/2006/main" xmlns:r="http://schemas.openxmlformats.org/officeDocument/2006/relationships" xmlns:p="http://schemas.openxmlformats.org/presentationml/2006/main">
+  <p:tag name="SLIDO_ELEMENT" val="title"/>
+</p:tagLst>
+</file>
+
+<file path=ppt/tags/tag5.xml><?xml version="1.0" encoding="utf-8"?>
+<p:tagLst xmlns:a="http://schemas.openxmlformats.org/drawingml/2006/main" xmlns:r="http://schemas.openxmlformats.org/officeDocument/2006/relationships" xmlns:p="http://schemas.openxmlformats.org/presentationml/2006/main">
+  <p:tag name="SLIDO_TYPE" val="SlidoPoll"/>
+  <p:tag name="SLIDO_POLL_UUID" val="46c8ba16-fca0-43fd-b1cb-5f39e34564df"/>
+  <p:tag name="SLIDO_TIMELINE" val="W3sicG9sbFF1ZXN0aW9uVXVpZCI6IjY4N2VhNDkxLWE2OWYtNDE5Yy1iNWNmLTJlNmI0ZTZjMWE5ZiIsInNob3dSZXN1bHRzIjpmYWxzZX0seyJwb2xsUXVlc3Rpb25VdWlkIjoiNjg3ZWE0OTEtYTY5Zi00MTljLWI1Y2YtMmU2YjRlNmMxYTlmIiwic2hvd1Jlc3VsdHMiOnRydWV9XQ=="/>
+</p:tagLst>
+</file>
+
+<file path=ppt/tags/tag6.xml><?xml version="1.0" encoding="utf-8"?>
+<p:tagLst xmlns:a="http://schemas.openxmlformats.org/drawingml/2006/main" xmlns:r="http://schemas.openxmlformats.org/officeDocument/2006/relationships" xmlns:p="http://schemas.openxmlformats.org/presentationml/2006/main">
+  <p:tag name="SLIDO_ELEMENT" val="interaction_image"/>
+  <p:tag name="INTERACTION_TYPE" val="OpenText"/>
+</p:tagLst>
+</file>
+
+<file path=ppt/tags/tag7.xml><?xml version="1.0" encoding="utf-8"?>
+<p:tagLst xmlns:a="http://schemas.openxmlformats.org/drawingml/2006/main" xmlns:r="http://schemas.openxmlformats.org/officeDocument/2006/relationships" xmlns:p="http://schemas.openxmlformats.org/presentationml/2006/main">
+  <p:tag name="SLIDO_ELEMENT" val="title"/>
+</p:tagLst>
 </file>
 
 <file path=ppt/theme/theme1.xml><?xml version="1.0" encoding="utf-8"?>
